--- a/redes_neurais/slides/cap03_Perceptron.pptx
+++ b/redes_neurais/slides/cap03_Perceptron.pptx
@@ -17,9 +17,15 @@
     <p:sldId id="265" r:id="rId11"/>
     <p:sldId id="266" r:id="rId12"/>
     <p:sldId id="267" r:id="rId13"/>
+    <p:sldId id="268" r:id="rId14"/>
+    <p:sldId id="269" r:id="rId15"/>
+    <p:sldId id="270" r:id="rId16"/>
+    <p:sldId id="271" r:id="rId17"/>
+    <p:sldId id="272" r:id="rId18"/>
+    <p:sldId id="273" r:id="rId19"/>
   </p:sldIdLst>
   <p:notesMasterIdLst>
-    <p:notesMasterId r:id="rId14"/>
+    <p:notesMasterId r:id="rId20"/>
   </p:notesMasterIdLst>
   <p:sldSz cx="9144000" cy="5143500"/>
   <p:notesSz cx="5143500" cy="9144000"/>
@@ -601,7 +607,7 @@
           <a:p>
             <a:r>
               <a:rPr lang="en-US" dirty="0"/>
-              <a:t>A regra delta usa a saída linear antes do limiar e minimiza o erro quadrático; o perceptron usa a saída binária.</a:t>
+              <a:t>Mostre a solução prática: limitar o número de épocas e olhar a acurácia.</a:t>
             </a:r>
             <a:endParaRPr lang="en-US" dirty="0"/>
           </a:p>
@@ -689,7 +695,7 @@
           <a:p>
             <a:r>
               <a:rPr lang="en-US" dirty="0"/>
-              <a:t>Tempo: 10 minutos. Mostre o script cap03.py como conferência.</a:t>
+              <a:t>Ideia central: a camada oculta aprende uma nova representação. Falta saber treiná-la: é o assunto do Capítulo 4.</a:t>
             </a:r>
             <a:endParaRPr lang="en-US" dirty="0"/>
           </a:p>
@@ -777,7 +783,7 @@
           <a:p>
             <a:r>
               <a:rPr lang="en-US" dirty="0"/>
-              <a:t>Transição: como corrigir os pesos de uma camada que não vemos?</a:t>
+              <a:t>A regra delta usa a saída linear antes do limiar e minimiza o erro quadrático; o perceptron usa a saída binária.</a:t>
             </a:r>
             <a:endParaRPr lang="en-US" dirty="0"/>
           </a:p>
@@ -801,6 +807,534 @@
             <a:fld id="{F7021451-1387-4CA6-816F-3879F97B5CBC}" type="slidenum">
               <a:rPr lang="en-US"/>
               <a:t>12</a:t>
+            </a:fld>
+            <a:endParaRPr lang="en-US"/>
+          </a:p>
+        </p:txBody>
+      </p:sp>
+    </p:spTree>
+    <p:extLst>
+      <p:ext uri="{BB962C8B-B14F-4D97-AF65-F5344CB8AC3E}">
+        <p14:creationId xmlns:p14="http://schemas.microsoft.com/office/powerpoint/2010/main" val="1024086991"/>
+      </p:ext>
+    </p:extLst>
+  </p:cSld>
+  <p:clrMapOvr>
+    <a:masterClrMapping/>
+  </p:clrMapOvr>
+</p:notes>
+</file>
+
+<file path=ppt/notesSlides/notesSlide13.xml><?xml version="1.0" encoding="utf-8"?>
+<p:notes xmlns:a="http://schemas.openxmlformats.org/drawingml/2006/main" xmlns:r="http://schemas.openxmlformats.org/officeDocument/2006/relationships" xmlns:p="http://schemas.openxmlformats.org/presentationml/2006/main">
+  <p:cSld>
+    <p:spTree>
+      <p:nvGrpSpPr>
+        <p:cNvPr id="1" name=""/>
+        <p:cNvGrpSpPr/>
+        <p:nvPr/>
+      </p:nvGrpSpPr>
+      <p:grpSpPr>
+        <a:xfrm>
+          <a:off x="0" y="0"/>
+          <a:ext cx="0" cy="0"/>
+          <a:chOff x="0" y="0"/>
+          <a:chExt cx="0" cy="0"/>
+        </a:xfrm>
+      </p:grpSpPr>
+      <p:sp>
+        <p:nvSpPr>
+          <p:cNvPr id="2" name="Slide Image Placeholder 1"/>
+          <p:cNvSpPr>
+            <a:spLocks noGrp="1" noRot="1" noChangeAspect="1"/>
+          </p:cNvSpPr>
+          <p:nvPr>
+            <p:ph type="sldImg"/>
+          </p:nvPr>
+        </p:nvSpPr>
+        <p:spPr/>
+      </p:sp>
+      <p:sp>
+        <p:nvSpPr>
+          <p:cNvPr id="3" name="Notes Placeholder 2"/>
+          <p:cNvSpPr>
+            <a:spLocks noGrp="1"/>
+          </p:cNvSpPr>
+          <p:nvPr>
+            <p:ph type="body" idx="1"/>
+          </p:nvPr>
+        </p:nvSpPr>
+        <p:spPr/>
+        <p:txBody>
+          <a:bodyPr/>
+          <a:lstStyle/>
+          <a:p>
+            <a:r>
+              <a:rPr lang="en-US" dirty="0"/>
+              <a:t>Datas conforme a lista de referências do livro. Evite atribuir 'invenção' a uma só pessoa.</a:t>
+            </a:r>
+            <a:endParaRPr lang="en-US" dirty="0"/>
+          </a:p>
+        </p:txBody>
+      </p:sp>
+      <p:sp>
+        <p:nvSpPr>
+          <p:cNvPr id="4" name="Slide Number Placeholder 3"/>
+          <p:cNvSpPr>
+            <a:spLocks noGrp="1"/>
+          </p:cNvSpPr>
+          <p:nvPr>
+            <p:ph type="sldNum" sz="quarter" idx="10"/>
+          </p:nvPr>
+        </p:nvSpPr>
+        <p:spPr/>
+        <p:txBody>
+          <a:bodyPr/>
+          <a:lstStyle/>
+          <a:p>
+            <a:fld id="{F7021451-1387-4CA6-816F-3879F97B5CBC}" type="slidenum">
+              <a:rPr lang="en-US"/>
+              <a:t>13</a:t>
+            </a:fld>
+            <a:endParaRPr lang="en-US"/>
+          </a:p>
+        </p:txBody>
+      </p:sp>
+    </p:spTree>
+    <p:extLst>
+      <p:ext uri="{BB962C8B-B14F-4D97-AF65-F5344CB8AC3E}">
+        <p14:creationId xmlns:p14="http://schemas.microsoft.com/office/powerpoint/2010/main" val="1024086991"/>
+      </p:ext>
+    </p:extLst>
+  </p:cSld>
+  <p:clrMapOvr>
+    <a:masterClrMapping/>
+  </p:clrMapOvr>
+</p:notes>
+</file>
+
+<file path=ppt/notesSlides/notesSlide14.xml><?xml version="1.0" encoding="utf-8"?>
+<p:notes xmlns:a="http://schemas.openxmlformats.org/drawingml/2006/main" xmlns:r="http://schemas.openxmlformats.org/officeDocument/2006/relationships" xmlns:p="http://schemas.openxmlformats.org/presentationml/2006/main">
+  <p:cSld>
+    <p:spTree>
+      <p:nvGrpSpPr>
+        <p:cNvPr id="1" name=""/>
+        <p:cNvGrpSpPr/>
+        <p:nvPr/>
+      </p:nvGrpSpPr>
+      <p:grpSpPr>
+        <a:xfrm>
+          <a:off x="0" y="0"/>
+          <a:ext cx="0" cy="0"/>
+          <a:chOff x="0" y="0"/>
+          <a:chExt cx="0" cy="0"/>
+        </a:xfrm>
+      </p:grpSpPr>
+      <p:sp>
+        <p:nvSpPr>
+          <p:cNvPr id="2" name="Slide Image Placeholder 1"/>
+          <p:cNvSpPr>
+            <a:spLocks noGrp="1" noRot="1" noChangeAspect="1"/>
+          </p:cNvSpPr>
+          <p:nvPr>
+            <p:ph type="sldImg"/>
+          </p:nvPr>
+        </p:nvSpPr>
+        <p:spPr/>
+      </p:sp>
+      <p:sp>
+        <p:nvSpPr>
+          <p:cNvPr id="3" name="Notes Placeholder 2"/>
+          <p:cNvSpPr>
+            <a:spLocks noGrp="1"/>
+          </p:cNvSpPr>
+          <p:nvPr>
+            <p:ph type="body" idx="1"/>
+          </p:nvPr>
+        </p:nvSpPr>
+        <p:spPr/>
+        <p:txBody>
+          <a:bodyPr/>
+          <a:lstStyle/>
+          <a:p>
+            <a:r>
+              <a:rPr lang="en-US" dirty="0"/>
+              <a:t>Resposta: D) XOR. O XOR não é linearmente separável. Dê um minuto para votação antes de revelar.</a:t>
+            </a:r>
+            <a:endParaRPr lang="en-US" dirty="0"/>
+          </a:p>
+        </p:txBody>
+      </p:sp>
+      <p:sp>
+        <p:nvSpPr>
+          <p:cNvPr id="4" name="Slide Number Placeholder 3"/>
+          <p:cNvSpPr>
+            <a:spLocks noGrp="1"/>
+          </p:cNvSpPr>
+          <p:nvPr>
+            <p:ph type="sldNum" sz="quarter" idx="10"/>
+          </p:nvPr>
+        </p:nvSpPr>
+        <p:spPr/>
+        <p:txBody>
+          <a:bodyPr/>
+          <a:lstStyle/>
+          <a:p>
+            <a:fld id="{F7021451-1387-4CA6-816F-3879F97B5CBC}" type="slidenum">
+              <a:rPr lang="en-US"/>
+              <a:t>14</a:t>
+            </a:fld>
+            <a:endParaRPr lang="en-US"/>
+          </a:p>
+        </p:txBody>
+      </p:sp>
+    </p:spTree>
+    <p:extLst>
+      <p:ext uri="{BB962C8B-B14F-4D97-AF65-F5344CB8AC3E}">
+        <p14:creationId xmlns:p14="http://schemas.microsoft.com/office/powerpoint/2010/main" val="1024086991"/>
+      </p:ext>
+    </p:extLst>
+  </p:cSld>
+  <p:clrMapOvr>
+    <a:masterClrMapping/>
+  </p:clrMapOvr>
+</p:notes>
+</file>
+
+<file path=ppt/notesSlides/notesSlide15.xml><?xml version="1.0" encoding="utf-8"?>
+<p:notes xmlns:a="http://schemas.openxmlformats.org/drawingml/2006/main" xmlns:r="http://schemas.openxmlformats.org/officeDocument/2006/relationships" xmlns:p="http://schemas.openxmlformats.org/presentationml/2006/main">
+  <p:cSld>
+    <p:spTree>
+      <p:nvGrpSpPr>
+        <p:cNvPr id="1" name=""/>
+        <p:cNvGrpSpPr/>
+        <p:nvPr/>
+      </p:nvGrpSpPr>
+      <p:grpSpPr>
+        <a:xfrm>
+          <a:off x="0" y="0"/>
+          <a:ext cx="0" cy="0"/>
+          <a:chOff x="0" y="0"/>
+          <a:chExt cx="0" cy="0"/>
+        </a:xfrm>
+      </p:grpSpPr>
+      <p:sp>
+        <p:nvSpPr>
+          <p:cNvPr id="2" name="Slide Image Placeholder 1"/>
+          <p:cNvSpPr>
+            <a:spLocks noGrp="1" noRot="1" noChangeAspect="1"/>
+          </p:cNvSpPr>
+          <p:nvPr>
+            <p:ph type="sldImg"/>
+          </p:nvPr>
+        </p:nvSpPr>
+        <p:spPr/>
+      </p:sp>
+      <p:sp>
+        <p:nvSpPr>
+          <p:cNvPr id="3" name="Notes Placeholder 2"/>
+          <p:cNvSpPr>
+            <a:spLocks noGrp="1"/>
+          </p:cNvSpPr>
+          <p:nvPr>
+            <p:ph type="body" idx="1"/>
+          </p:nvPr>
+        </p:nvSpPr>
+        <p:spPr/>
+        <p:txBody>
+          <a:bodyPr/>
+          <a:lstStyle/>
+          <a:p>
+            <a:r>
+              <a:rPr lang="en-US" dirty="0"/>
+              <a:t>Resposta: A) Somente quando erra. Com e = t − ŷ, se e = 0 nada muda. Dê um minuto para votação antes de revelar.</a:t>
+            </a:r>
+            <a:endParaRPr lang="en-US" dirty="0"/>
+          </a:p>
+        </p:txBody>
+      </p:sp>
+      <p:sp>
+        <p:nvSpPr>
+          <p:cNvPr id="4" name="Slide Number Placeholder 3"/>
+          <p:cNvSpPr>
+            <a:spLocks noGrp="1"/>
+          </p:cNvSpPr>
+          <p:nvPr>
+            <p:ph type="sldNum" sz="quarter" idx="10"/>
+          </p:nvPr>
+        </p:nvSpPr>
+        <p:spPr/>
+        <p:txBody>
+          <a:bodyPr/>
+          <a:lstStyle/>
+          <a:p>
+            <a:fld id="{F7021451-1387-4CA6-816F-3879F97B5CBC}" type="slidenum">
+              <a:rPr lang="en-US"/>
+              <a:t>15</a:t>
+            </a:fld>
+            <a:endParaRPr lang="en-US"/>
+          </a:p>
+        </p:txBody>
+      </p:sp>
+    </p:spTree>
+    <p:extLst>
+      <p:ext uri="{BB962C8B-B14F-4D97-AF65-F5344CB8AC3E}">
+        <p14:creationId xmlns:p14="http://schemas.microsoft.com/office/powerpoint/2010/main" val="1024086991"/>
+      </p:ext>
+    </p:extLst>
+  </p:cSld>
+  <p:clrMapOvr>
+    <a:masterClrMapping/>
+  </p:clrMapOvr>
+</p:notes>
+</file>
+
+<file path=ppt/notesSlides/notesSlide16.xml><?xml version="1.0" encoding="utf-8"?>
+<p:notes xmlns:a="http://schemas.openxmlformats.org/drawingml/2006/main" xmlns:r="http://schemas.openxmlformats.org/officeDocument/2006/relationships" xmlns:p="http://schemas.openxmlformats.org/presentationml/2006/main">
+  <p:cSld>
+    <p:spTree>
+      <p:nvGrpSpPr>
+        <p:cNvPr id="1" name=""/>
+        <p:cNvGrpSpPr/>
+        <p:nvPr/>
+      </p:nvGrpSpPr>
+      <p:grpSpPr>
+        <a:xfrm>
+          <a:off x="0" y="0"/>
+          <a:ext cx="0" cy="0"/>
+          <a:chOff x="0" y="0"/>
+          <a:chExt cx="0" cy="0"/>
+        </a:xfrm>
+      </p:grpSpPr>
+      <p:sp>
+        <p:nvSpPr>
+          <p:cNvPr id="2" name="Slide Image Placeholder 1"/>
+          <p:cNvSpPr>
+            <a:spLocks noGrp="1" noRot="1" noChangeAspect="1"/>
+          </p:cNvSpPr>
+          <p:nvPr>
+            <p:ph type="sldImg"/>
+          </p:nvPr>
+        </p:nvSpPr>
+        <p:spPr/>
+      </p:sp>
+      <p:sp>
+        <p:nvSpPr>
+          <p:cNvPr id="3" name="Notes Placeholder 2"/>
+          <p:cNvSpPr>
+            <a:spLocks noGrp="1"/>
+          </p:cNvSpPr>
+          <p:nvPr>
+            <p:ph type="body" idx="1"/>
+          </p:nvPr>
+        </p:nvSpPr>
+        <p:spPr/>
+        <p:txBody>
+          <a:bodyPr/>
+          <a:lstStyle/>
+          <a:p>
+            <a:r>
+              <a:rPr lang="en-US" dirty="0"/>
+              <a:t>Tempo: 10 minutos. Mostre o script cap03.py como conferência.</a:t>
+            </a:r>
+            <a:endParaRPr lang="en-US" dirty="0"/>
+          </a:p>
+        </p:txBody>
+      </p:sp>
+      <p:sp>
+        <p:nvSpPr>
+          <p:cNvPr id="4" name="Slide Number Placeholder 3"/>
+          <p:cNvSpPr>
+            <a:spLocks noGrp="1"/>
+          </p:cNvSpPr>
+          <p:nvPr>
+            <p:ph type="sldNum" sz="quarter" idx="10"/>
+          </p:nvPr>
+        </p:nvSpPr>
+        <p:spPr/>
+        <p:txBody>
+          <a:bodyPr/>
+          <a:lstStyle/>
+          <a:p>
+            <a:fld id="{F7021451-1387-4CA6-816F-3879F97B5CBC}" type="slidenum">
+              <a:rPr lang="en-US"/>
+              <a:t>16</a:t>
+            </a:fld>
+            <a:endParaRPr lang="en-US"/>
+          </a:p>
+        </p:txBody>
+      </p:sp>
+    </p:spTree>
+    <p:extLst>
+      <p:ext uri="{BB962C8B-B14F-4D97-AF65-F5344CB8AC3E}">
+        <p14:creationId xmlns:p14="http://schemas.microsoft.com/office/powerpoint/2010/main" val="1024086991"/>
+      </p:ext>
+    </p:extLst>
+  </p:cSld>
+  <p:clrMapOvr>
+    <a:masterClrMapping/>
+  </p:clrMapOvr>
+</p:notes>
+</file>
+
+<file path=ppt/notesSlides/notesSlide17.xml><?xml version="1.0" encoding="utf-8"?>
+<p:notes xmlns:a="http://schemas.openxmlformats.org/drawingml/2006/main" xmlns:r="http://schemas.openxmlformats.org/officeDocument/2006/relationships" xmlns:p="http://schemas.openxmlformats.org/presentationml/2006/main">
+  <p:cSld>
+    <p:spTree>
+      <p:nvGrpSpPr>
+        <p:cNvPr id="1" name=""/>
+        <p:cNvGrpSpPr/>
+        <p:nvPr/>
+      </p:nvGrpSpPr>
+      <p:grpSpPr>
+        <a:xfrm>
+          <a:off x="0" y="0"/>
+          <a:ext cx="0" cy="0"/>
+          <a:chOff x="0" y="0"/>
+          <a:chExt cx="0" cy="0"/>
+        </a:xfrm>
+      </p:grpSpPr>
+      <p:sp>
+        <p:nvSpPr>
+          <p:cNvPr id="2" name="Slide Image Placeholder 1"/>
+          <p:cNvSpPr>
+            <a:spLocks noGrp="1" noRot="1" noChangeAspect="1"/>
+          </p:cNvSpPr>
+          <p:nvPr>
+            <p:ph type="sldImg"/>
+          </p:nvPr>
+        </p:nvSpPr>
+        <p:spPr/>
+      </p:sp>
+      <p:sp>
+        <p:nvSpPr>
+          <p:cNvPr id="3" name="Notes Placeholder 2"/>
+          <p:cNvSpPr>
+            <a:spLocks noGrp="1"/>
+          </p:cNvSpPr>
+          <p:nvPr>
+            <p:ph type="body" idx="1"/>
+          </p:nvPr>
+        </p:nvSpPr>
+        <p:spPr/>
+        <p:txBody>
+          <a:bodyPr/>
+          <a:lstStyle/>
+          <a:p>
+            <a:r>
+              <a:rPr lang="en-US" dirty="0"/>
+              <a:t>Transição: como corrigir os pesos de uma camada que não vemos?</a:t>
+            </a:r>
+            <a:endParaRPr lang="en-US" dirty="0"/>
+          </a:p>
+        </p:txBody>
+      </p:sp>
+      <p:sp>
+        <p:nvSpPr>
+          <p:cNvPr id="4" name="Slide Number Placeholder 3"/>
+          <p:cNvSpPr>
+            <a:spLocks noGrp="1"/>
+          </p:cNvSpPr>
+          <p:nvPr>
+            <p:ph type="sldNum" sz="quarter" idx="10"/>
+          </p:nvPr>
+        </p:nvSpPr>
+        <p:spPr/>
+        <p:txBody>
+          <a:bodyPr/>
+          <a:lstStyle/>
+          <a:p>
+            <a:fld id="{F7021451-1387-4CA6-816F-3879F97B5CBC}" type="slidenum">
+              <a:rPr lang="en-US"/>
+              <a:t>17</a:t>
+            </a:fld>
+            <a:endParaRPr lang="en-US"/>
+          </a:p>
+        </p:txBody>
+      </p:sp>
+    </p:spTree>
+    <p:extLst>
+      <p:ext uri="{BB962C8B-B14F-4D97-AF65-F5344CB8AC3E}">
+        <p14:creationId xmlns:p14="http://schemas.microsoft.com/office/powerpoint/2010/main" val="1024086991"/>
+      </p:ext>
+    </p:extLst>
+  </p:cSld>
+  <p:clrMapOvr>
+    <a:masterClrMapping/>
+  </p:clrMapOvr>
+</p:notes>
+</file>
+
+<file path=ppt/notesSlides/notesSlide18.xml><?xml version="1.0" encoding="utf-8"?>
+<p:notes xmlns:a="http://schemas.openxmlformats.org/drawingml/2006/main" xmlns:r="http://schemas.openxmlformats.org/officeDocument/2006/relationships" xmlns:p="http://schemas.openxmlformats.org/presentationml/2006/main">
+  <p:cSld>
+    <p:spTree>
+      <p:nvGrpSpPr>
+        <p:cNvPr id="1" name=""/>
+        <p:cNvGrpSpPr/>
+        <p:nvPr/>
+      </p:nvGrpSpPr>
+      <p:grpSpPr>
+        <a:xfrm>
+          <a:off x="0" y="0"/>
+          <a:ext cx="0" cy="0"/>
+          <a:chOff x="0" y="0"/>
+          <a:chExt cx="0" cy="0"/>
+        </a:xfrm>
+      </p:grpSpPr>
+      <p:sp>
+        <p:nvSpPr>
+          <p:cNvPr id="2" name="Slide Image Placeholder 1"/>
+          <p:cNvSpPr>
+            <a:spLocks noGrp="1" noRot="1" noChangeAspect="1"/>
+          </p:cNvSpPr>
+          <p:nvPr>
+            <p:ph type="sldImg"/>
+          </p:nvPr>
+        </p:nvSpPr>
+        <p:spPr/>
+      </p:sp>
+      <p:sp>
+        <p:nvSpPr>
+          <p:cNvPr id="3" name="Notes Placeholder 2"/>
+          <p:cNvSpPr>
+            <a:spLocks noGrp="1"/>
+          </p:cNvSpPr>
+          <p:nvPr>
+            <p:ph type="body" idx="1"/>
+          </p:nvPr>
+        </p:nvSpPr>
+        <p:spPr/>
+        <p:txBody>
+          <a:bodyPr/>
+          <a:lstStyle/>
+          <a:p>
+            <a:r>
+              <a:rPr lang="en-US" dirty="0"/>
+              <a:t>Feche com a frase e peça que os estudantes a expliquem com as próprias palavras.</a:t>
+            </a:r>
+            <a:endParaRPr lang="en-US" dirty="0"/>
+          </a:p>
+        </p:txBody>
+      </p:sp>
+      <p:sp>
+        <p:nvSpPr>
+          <p:cNvPr id="4" name="Slide Number Placeholder 3"/>
+          <p:cNvSpPr>
+            <a:spLocks noGrp="1"/>
+          </p:cNvSpPr>
+          <p:nvPr>
+            <p:ph type="sldNum" sz="quarter" idx="10"/>
+          </p:nvPr>
+        </p:nvSpPr>
+        <p:spPr/>
+        <p:txBody>
+          <a:bodyPr/>
+          <a:lstStyle/>
+          <a:p>
+            <a:fld id="{F7021451-1387-4CA6-816F-3879F97B5CBC}" type="slidenum">
+              <a:rPr lang="en-US"/>
+              <a:t>18</a:t>
             </a:fld>
             <a:endParaRPr lang="en-US"/>
           </a:p>
@@ -865,7 +1399,7 @@
           <a:p>
             <a:r>
               <a:rPr lang="en-US" dirty="0"/>
-              <a:t>Analogia: um porteiro que ajusta seu critério a cada erro de julgamento.</a:t>
+              <a:t>Apresente o roteiro e o tempo estimado de cada bloco (cerca de 2 minutos por slide).</a:t>
             </a:r>
             <a:endParaRPr lang="en-US" dirty="0"/>
           </a:p>
@@ -953,7 +1487,7 @@
           <a:p>
             <a:r>
               <a:rPr lang="en-US" dirty="0"/>
-              <a:t>O viés pode ser visto como um peso para uma entrada constante igual a 1.</a:t>
+              <a:t>Analogia: um porteiro que ajusta seu critério a cada erro de julgamento.</a:t>
             </a:r>
             <a:endParaRPr lang="en-US" dirty="0"/>
           </a:p>
@@ -1041,7 +1575,7 @@
           <a:p>
             <a:r>
               <a:rPr lang="en-US" dirty="0"/>
-              <a:t>Só há mudança quando há erro. Se t = 1 e ŷ = 0, o vetor w é empurrado na direção de x.</a:t>
+              <a:t>O viés pode ser visto como um peso para uma entrada constante igual a 1.</a:t>
             </a:r>
             <a:endParaRPr lang="en-US" dirty="0"/>
           </a:p>
@@ -1129,7 +1663,7 @@
           <a:p>
             <a:r>
               <a:rPr lang="en-US" dirty="0"/>
-              <a:t>Peça que os estudantes prevejam em que época a reta para de mudar.</a:t>
+              <a:t>Converse sobre o que seria um convidado impossível de classificar por uma reta: o XOR.</a:t>
             </a:r>
             <a:endParaRPr lang="en-US" dirty="0"/>
           </a:p>
@@ -1217,7 +1751,7 @@
           <a:p>
             <a:r>
               <a:rPr lang="en-US" dirty="0"/>
-              <a:t>Prepare o gancho: o XOR é o contraexemplo clássico (Minsky e Papert, 1969).</a:t>
+              <a:t>Só há mudança quando há erro. Se t = 1 e ŷ = 0, o vetor w é empurrado na direção de x.</a:t>
             </a:r>
             <a:endParaRPr lang="en-US" dirty="0"/>
           </a:p>
@@ -1305,7 +1839,7 @@
           <a:p>
             <a:r>
               <a:rPr lang="en-US" dirty="0"/>
-              <a:t>A demonstração está no capítulo com todos os passos. Aqui, o importante é a interpretação: margem grande, poucas correções.</a:t>
+              <a:t>Peça que os estudantes prevejam em que época a reta para de mudar.</a:t>
             </a:r>
             <a:endParaRPr lang="en-US" dirty="0"/>
           </a:p>
@@ -1393,7 +1927,7 @@
           <a:p>
             <a:r>
               <a:rPr lang="en-US" dirty="0"/>
-              <a:t>Mostre a solução prática: limitar o número de épocas e olhar a acurácia.</a:t>
+              <a:t>Prepare o gancho: o XOR é o contraexemplo clássico (Minsky e Papert, 1969).</a:t>
             </a:r>
             <a:endParaRPr lang="en-US" dirty="0"/>
           </a:p>
@@ -1481,7 +2015,7 @@
           <a:p>
             <a:r>
               <a:rPr lang="en-US" dirty="0"/>
-              <a:t>Ideia central: a camada oculta aprende uma nova representação. Falta saber treiná-la: é o assunto do Capítulo 4.</a:t>
+              <a:t>A demonstração está no capítulo com todos os passos. Aqui, o importante é a interpretação: margem grande, poucas correções.</a:t>
             </a:r>
             <a:endParaRPr lang="en-US" dirty="0"/>
           </a:p>
@@ -2290,22 +2824,46 @@
                 <a:ea typeface="Calibri" pitchFamily="34" charset="-122"/>
                 <a:cs typeface="Calibri" pitchFamily="34" charset="-120"/>
               </a:rPr>
-              <a:t>Erros frequentes</a:t>
+              <a:t>Quando não há separação</a:t>
             </a:r>
             <a:endParaRPr lang="en-US" sz="2600" dirty="0"/>
           </a:p>
         </p:txBody>
       </p:sp>
-      <p:sp>
-        <p:nvSpPr>
-          <p:cNvPr id="3" name="Text 1"/>
+      <p:pic>
+        <p:nvPicPr>
+          <p:cNvPr id="3" name="Image 0" descr="Sem reta que separe, o perceptron oscila.">    </p:cNvPr>
+          <p:cNvPicPr>
+            <a:picLocks noChangeAspect="1"/>
+          </p:cNvPicPr>
+          <p:nvPr/>
+        </p:nvPicPr>
+        <p:blipFill>
+          <a:blip r:embed="rId1"/>
+          <a:stretch>
+            <a:fillRect/>
+          </a:stretch>
+        </p:blipFill>
+        <p:spPr>
+          <a:xfrm>
+            <a:off x="808185" y="1005840"/>
+            <a:ext cx="7527631" cy="3154680"/>
+          </a:xfrm>
+          <a:prstGeom prst="rect">
+            <a:avLst/>
+          </a:prstGeom>
+        </p:spPr>
+      </p:pic>
+      <p:sp>
+        <p:nvSpPr>
+          <p:cNvPr id="4" name="Text 1"/>
           <p:cNvSpPr txBox="1"/>
           <p:nvPr/>
         </p:nvSpPr>
         <p:spPr>
           <a:xfrm>
-            <a:off x="548640" y="1188720"/>
-            <a:ext cx="8046720" cy="3383280"/>
+            <a:off x="457200" y="4251960"/>
+            <a:ext cx="8229600" cy="457200"/>
           </a:xfrm>
           <a:prstGeom prst="rect">
             <a:avLst/>
@@ -2319,76 +2877,18 @@
           </a:bodyPr>
           <a:lstStyle/>
           <a:p>
-            <a:pPr marL="342900" indent="-342900">
-              <a:spcAft>
-                <a:spcPts val="1400"/>
-              </a:spcAft>
-              <a:buSzPct val="100000"/>
-              <a:buChar char="•"/>
-            </a:pPr>
-            <a:r>
-              <a:rPr lang="en-US" sz="2400" dirty="0">
-                <a:solidFill>
-                  <a:srgbClr val="1F2937"/>
-                </a:solidFill>
-              </a:rPr>
-              <a:t>Esquecer o viés</a:t>
-            </a:r>
-            <a:endParaRPr lang="en-US" sz="2400" dirty="0"/>
-          </a:p>
-          <a:p>
-            <a:pPr marL="342900" indent="-342900">
-              <a:spcAft>
-                <a:spcPts val="1400"/>
-              </a:spcAft>
-              <a:buSzPct val="100000"/>
-              <a:buChar char="•"/>
-            </a:pPr>
-            <a:r>
-              <a:rPr lang="en-US" sz="2400" dirty="0">
-                <a:solidFill>
-                  <a:srgbClr val="1F2937"/>
-                </a:solidFill>
-              </a:rPr>
-              <a:t>Usar taxa nula ou negativa</a:t>
-            </a:r>
-            <a:endParaRPr lang="en-US" sz="2400" dirty="0"/>
-          </a:p>
-          <a:p>
-            <a:pPr marL="342900" indent="-342900">
-              <a:spcAft>
-                <a:spcPts val="1400"/>
-              </a:spcAft>
-              <a:buSzPct val="100000"/>
-              <a:buChar char="•"/>
-            </a:pPr>
-            <a:r>
-              <a:rPr lang="en-US" sz="2400" dirty="0">
-                <a:solidFill>
-                  <a:srgbClr val="1F2937"/>
-                </a:solidFill>
-              </a:rPr>
-              <a:t>Dizer que o perceptron sempre converge</a:t>
-            </a:r>
-            <a:endParaRPr lang="en-US" sz="2400" dirty="0"/>
-          </a:p>
-          <a:p>
-            <a:pPr marL="342900" indent="-342900">
-              <a:spcAft>
-                <a:spcPts val="1400"/>
-              </a:spcAft>
-              <a:buSzPct val="100000"/>
-              <a:buChar char="•"/>
-            </a:pPr>
-            <a:r>
-              <a:rPr lang="en-US" sz="2400" dirty="0">
-                <a:solidFill>
-                  <a:srgbClr val="1F2937"/>
-                </a:solidFill>
-              </a:rPr>
-              <a:t>Confundir a regra do perceptron com a regra delta (Widrow–Hoff)</a:t>
-            </a:r>
-            <a:endParaRPr lang="en-US" sz="2400" dirty="0"/>
+            <a:pPr algn="ctr" indent="0" marL="0">
+              <a:buNone/>
+            </a:pPr>
+            <a:r>
+              <a:rPr lang="en-US" sz="1400" i="1" dirty="0">
+                <a:solidFill>
+                  <a:srgbClr val="4B5563"/>
+                </a:solidFill>
+              </a:rPr>
+              <a:t>Sem reta que separe, o perceptron oscila.</a:t>
+            </a:r>
+            <a:endParaRPr lang="en-US" sz="1400" dirty="0"/>
           </a:p>
         </p:txBody>
       </p:sp>
@@ -2497,85 +2997,46 @@
                 <a:ea typeface="Calibri" pitchFamily="34" charset="-122"/>
                 <a:cs typeface="Calibri" pitchFamily="34" charset="-120"/>
               </a:rPr>
-              <a:t>Atividade</a:t>
+              <a:t>XOR resolvido com duas camadas</a:t>
             </a:r>
             <a:endParaRPr lang="en-US" sz="2600" dirty="0"/>
           </a:p>
         </p:txBody>
       </p:sp>
-      <p:sp>
-        <p:nvSpPr>
-          <p:cNvPr id="3" name="Shape 1"/>
-          <p:cNvSpPr/>
-          <p:nvPr/>
-        </p:nvSpPr>
-        <p:spPr>
-          <a:xfrm>
-            <a:off x="548640" y="1188720"/>
-            <a:ext cx="8046720" cy="3108960"/>
-          </a:xfrm>
-          <a:prstGeom prst="roundRect">
-            <a:avLst>
-              <a:gd name="adj" fmla="val 3529"/>
-            </a:avLst>
-          </a:prstGeom>
-          <a:solidFill>
-            <a:srgbClr val="FFFBEB"/>
-          </a:solidFill>
-          <a:ln w="25400">
-            <a:solidFill>
-              <a:srgbClr val="F59E0B"/>
-            </a:solidFill>
-            <a:prstDash val="solid"/>
-          </a:ln>
-        </p:spPr>
-      </p:sp>
-      <p:sp>
-        <p:nvSpPr>
-          <p:cNvPr id="4" name="Text 2"/>
+      <p:pic>
+        <p:nvPicPr>
+          <p:cNvPr id="3" name="Image 0" descr="Uma camada oculta transforma o espaço e torna o problema separável.">    </p:cNvPr>
+          <p:cNvPicPr>
+            <a:picLocks noChangeAspect="1"/>
+          </p:cNvPicPr>
+          <p:nvPr/>
+        </p:nvPicPr>
+        <p:blipFill>
+          <a:blip r:embed="rId1"/>
+          <a:stretch>
+            <a:fillRect/>
+          </a:stretch>
+        </p:blipFill>
+        <p:spPr>
+          <a:xfrm>
+            <a:off x="457200" y="1005840"/>
+            <a:ext cx="8229600" cy="3048000"/>
+          </a:xfrm>
+          <a:prstGeom prst="rect">
+            <a:avLst/>
+          </a:prstGeom>
+        </p:spPr>
+      </p:pic>
+      <p:sp>
+        <p:nvSpPr>
+          <p:cNvPr id="4" name="Text 1"/>
           <p:cNvSpPr txBox="1"/>
           <p:nvPr/>
         </p:nvSpPr>
         <p:spPr>
           <a:xfrm>
-            <a:off x="822960" y="1325880"/>
-            <a:ext cx="3657600" cy="365760"/>
-          </a:xfrm>
-          <a:prstGeom prst="rect">
-            <a:avLst/>
-          </a:prstGeom>
-          <a:noFill/>
-          <a:ln/>
-        </p:spPr>
-        <p:txBody>
-          <a:bodyPr wrap="square" lIns="0" tIns="0" rIns="0" bIns="0" rtlCol="0" anchor="ctr"/>
-          <a:lstStyle/>
-          <a:p>
-            <a:pPr indent="0" marL="0">
-              <a:buNone/>
-            </a:pPr>
-            <a:r>
-              <a:rPr lang="en-US" sz="1400" b="1" spc="300" kern="0" dirty="0">
-                <a:solidFill>
-                  <a:srgbClr val="B45309"/>
-                </a:solidFill>
-              </a:rPr>
-              <a:t>MÃO NA MASSA</a:t>
-            </a:r>
-            <a:endParaRPr lang="en-US" sz="1400" dirty="0"/>
-          </a:p>
-        </p:txBody>
-      </p:sp>
-      <p:sp>
-        <p:nvSpPr>
-          <p:cNvPr id="5" name="Text 3"/>
-          <p:cNvSpPr txBox="1"/>
-          <p:nvPr/>
-        </p:nvSpPr>
-        <p:spPr>
-          <a:xfrm>
-            <a:off x="822960" y="1783080"/>
-            <a:ext cx="7498080" cy="2377440"/>
+            <a:off x="457200" y="4145280"/>
+            <a:ext cx="8229600" cy="457200"/>
           </a:xfrm>
           <a:prstGeom prst="rect">
             <a:avLst/>
@@ -2589,18 +3050,18 @@
           </a:bodyPr>
           <a:lstStyle/>
           <a:p>
-            <a:pPr indent="0" marL="0">
+            <a:pPr algn="ctr" indent="0" marL="0">
               <a:buNone/>
             </a:pPr>
             <a:r>
-              <a:rPr lang="en-US" sz="2100" dirty="0">
-                <a:solidFill>
-                  <a:srgbClr val="1F2937"/>
-                </a:solidFill>
-              </a:rPr>
-              <a:t>Treine um perceptron para a porta OR com w = (0, 0), b = 0, η = 1. Escreva os pesos após cada época até a convergência. Depois tente o XOR e explique o que aconteceu.</a:t>
-            </a:r>
-            <a:endParaRPr lang="en-US" sz="2100" dirty="0"/>
+              <a:rPr lang="en-US" sz="1400" i="1" dirty="0">
+                <a:solidFill>
+                  <a:srgbClr val="4B5563"/>
+                </a:solidFill>
+              </a:rPr>
+              <a:t>Uma camada oculta transforma o espaço e torna o problema separável.</a:t>
+            </a:r>
+            <a:endParaRPr lang="en-US" sz="1400" dirty="0"/>
           </a:p>
         </p:txBody>
       </p:sp>
@@ -2682,6 +3143,1468 @@
         </p:nvSpPr>
         <p:spPr>
           <a:xfrm>
+            <a:off x="365760" y="109728"/>
+            <a:ext cx="8412480" cy="658368"/>
+          </a:xfrm>
+          <a:prstGeom prst="rect">
+            <a:avLst/>
+          </a:prstGeom>
+          <a:noFill/>
+          <a:ln/>
+        </p:spPr>
+        <p:txBody>
+          <a:bodyPr wrap="square" lIns="0" tIns="0" rIns="0" bIns="0" rtlCol="0" anchor="ctr">
+            <a:normAutofit/>
+          </a:bodyPr>
+          <a:lstStyle/>
+          <a:p>
+            <a:pPr indent="0" marL="0">
+              <a:buNone/>
+            </a:pPr>
+            <a:r>
+              <a:rPr lang="en-US" sz="2600" b="1" dirty="0">
+                <a:solidFill>
+                  <a:srgbClr val="FFFFFF"/>
+                </a:solidFill>
+                <a:latin typeface="Calibri" pitchFamily="34" charset="0"/>
+                <a:ea typeface="Calibri" pitchFamily="34" charset="-122"/>
+                <a:cs typeface="Calibri" pitchFamily="34" charset="-120"/>
+              </a:rPr>
+              <a:t>Erros frequentes</a:t>
+            </a:r>
+            <a:endParaRPr lang="en-US" sz="2600" dirty="0"/>
+          </a:p>
+        </p:txBody>
+      </p:sp>
+      <p:sp>
+        <p:nvSpPr>
+          <p:cNvPr id="3" name="Text 1"/>
+          <p:cNvSpPr txBox="1"/>
+          <p:nvPr/>
+        </p:nvSpPr>
+        <p:spPr>
+          <a:xfrm>
+            <a:off x="548640" y="1188720"/>
+            <a:ext cx="8046720" cy="3383280"/>
+          </a:xfrm>
+          <a:prstGeom prst="rect">
+            <a:avLst/>
+          </a:prstGeom>
+          <a:noFill/>
+          <a:ln/>
+        </p:spPr>
+        <p:txBody>
+          <a:bodyPr wrap="square" lIns="0" tIns="0" rIns="0" bIns="0" rtlCol="0" anchor="t">
+            <a:normAutofit/>
+          </a:bodyPr>
+          <a:lstStyle/>
+          <a:p>
+            <a:pPr marL="342900" indent="-342900">
+              <a:spcAft>
+                <a:spcPts val="1400"/>
+              </a:spcAft>
+              <a:buSzPct val="100000"/>
+              <a:buChar char="•"/>
+            </a:pPr>
+            <a:r>
+              <a:rPr lang="en-US" sz="2400" dirty="0">
+                <a:solidFill>
+                  <a:srgbClr val="1F2937"/>
+                </a:solidFill>
+              </a:rPr>
+              <a:t>Esquecer o viés</a:t>
+            </a:r>
+            <a:endParaRPr lang="en-US" sz="2400" dirty="0"/>
+          </a:p>
+          <a:p>
+            <a:pPr marL="342900" indent="-342900">
+              <a:spcAft>
+                <a:spcPts val="1400"/>
+              </a:spcAft>
+              <a:buSzPct val="100000"/>
+              <a:buChar char="•"/>
+            </a:pPr>
+            <a:r>
+              <a:rPr lang="en-US" sz="2400" dirty="0">
+                <a:solidFill>
+                  <a:srgbClr val="1F2937"/>
+                </a:solidFill>
+              </a:rPr>
+              <a:t>Usar taxa nula ou negativa</a:t>
+            </a:r>
+            <a:endParaRPr lang="en-US" sz="2400" dirty="0"/>
+          </a:p>
+          <a:p>
+            <a:pPr marL="342900" indent="-342900">
+              <a:spcAft>
+                <a:spcPts val="1400"/>
+              </a:spcAft>
+              <a:buSzPct val="100000"/>
+              <a:buChar char="•"/>
+            </a:pPr>
+            <a:r>
+              <a:rPr lang="en-US" sz="2400" dirty="0">
+                <a:solidFill>
+                  <a:srgbClr val="1F2937"/>
+                </a:solidFill>
+              </a:rPr>
+              <a:t>Dizer que o perceptron sempre converge</a:t>
+            </a:r>
+            <a:endParaRPr lang="en-US" sz="2400" dirty="0"/>
+          </a:p>
+          <a:p>
+            <a:pPr marL="342900" indent="-342900">
+              <a:spcAft>
+                <a:spcPts val="1400"/>
+              </a:spcAft>
+              <a:buSzPct val="100000"/>
+              <a:buChar char="•"/>
+            </a:pPr>
+            <a:r>
+              <a:rPr lang="en-US" sz="2400" dirty="0">
+                <a:solidFill>
+                  <a:srgbClr val="1F2937"/>
+                </a:solidFill>
+              </a:rPr>
+              <a:t>Confundir a regra do perceptron com a regra delta (Widrow–Hoff)</a:t>
+            </a:r>
+            <a:endParaRPr lang="en-US" sz="2400" dirty="0"/>
+          </a:p>
+        </p:txBody>
+      </p:sp>
+      <p:sp>
+        <p:nvSpPr>
+          <p:cNvPr id="25" name="Slide Number Placeholder 0"/>
+          <p:cNvSpPr>
+            <a:spLocks noGrp="1"/>
+          </p:cNvSpPr>
+          <p:nvPr>
+            <p:ph type="sldNum" sz="quarter" idx="4294967295"/>
+          </p:nvPr>
+        </p:nvSpPr>
+        <p:spPr>
+          <a:xfrm>
+            <a:off x="8412480" y="4828032"/>
+            <a:ext cx="457200" cy="228600"/>
+          </a:xfrm>
+          <a:prstGeom prst="rect">
+            <a:avLst/>
+          </a:prstGeom>
+          <a:extLst>
+            <a:ext uri="{C572A759-6A51-4108-AA02-DFA0A04FC94B}">
+              <ma14:wrappingTextBoxFlag xmlns:ma14="http://schemas.microsoft.com/office/mac/drawingml/2011/main" val="0"/>
+            </a:ext>
+          </a:extLst>
+        </p:spPr>
+        <p:txBody>
+          <a:bodyPr/>
+          <a:lstStyle>
+            <a:lvl1pPr>
+              <a:defRPr sz="900">
+                <a:solidFill>
+                  <a:srgbClr val="6B7280"/>
+                </a:solidFill>
+              </a:defRPr>
+            </a:lvl1pPr>
+          </a:lstStyle>
+          <a:p>
+            <a:pPr algn="l"/>
+            <a:fld id="{F7021451-1387-4CA6-816F-3879F97B5CBC}" type="slidenum">
+              <a:rPr b="0" lang="en-US"/>
+              <a:t>12</a:t>
+            </a:fld>
+            <a:endParaRPr lang="en-US"/>
+          </a:p>
+        </p:txBody>
+      </p:sp>
+    </p:spTree>
+  </p:cSld>
+  <p:clrMapOvr>
+    <a:masterClrMapping/>
+  </p:clrMapOvr>
+</p:sld>
+</file>
+
+<file path=ppt/slides/slide13.xml><?xml version="1.0" encoding="utf-8"?>
+<p:sld xmlns:a="http://schemas.openxmlformats.org/drawingml/2006/main" xmlns:r="http://schemas.openxmlformats.org/officeDocument/2006/relationships" xmlns:p="http://schemas.openxmlformats.org/presentationml/2006/main">
+  <p:cSld name="Slide 13">
+    <p:spTree>
+      <p:nvGrpSpPr>
+        <p:cNvPr id="1" name=""/>
+        <p:cNvGrpSpPr/>
+        <p:nvPr/>
+      </p:nvGrpSpPr>
+      <p:grpSpPr>
+        <a:xfrm>
+          <a:off x="0" y="0"/>
+          <a:ext cx="0" cy="0"/>
+          <a:chOff x="0" y="0"/>
+          <a:chExt cx="0" cy="0"/>
+        </a:xfrm>
+      </p:grpSpPr>
+      <p:sp>
+        <p:nvSpPr>
+          <p:cNvPr id="2" name="Text 0"/>
+          <p:cNvSpPr txBox="1"/>
+          <p:nvPr/>
+        </p:nvSpPr>
+        <p:spPr>
+          <a:xfrm>
+            <a:off x="365760" y="109728"/>
+            <a:ext cx="8412480" cy="658368"/>
+          </a:xfrm>
+          <a:prstGeom prst="rect">
+            <a:avLst/>
+          </a:prstGeom>
+          <a:noFill/>
+          <a:ln/>
+        </p:spPr>
+        <p:txBody>
+          <a:bodyPr wrap="square" lIns="0" tIns="0" rIns="0" bIns="0" rtlCol="0" anchor="ctr">
+            <a:normAutofit/>
+          </a:bodyPr>
+          <a:lstStyle/>
+          <a:p>
+            <a:pPr indent="0" marL="0">
+              <a:buNone/>
+            </a:pPr>
+            <a:r>
+              <a:rPr lang="en-US" sz="2600" b="1" dirty="0">
+                <a:solidFill>
+                  <a:srgbClr val="FFFFFF"/>
+                </a:solidFill>
+                <a:latin typeface="Calibri" pitchFamily="34" charset="0"/>
+                <a:ea typeface="Calibri" pitchFamily="34" charset="-122"/>
+                <a:cs typeface="Calibri" pitchFamily="34" charset="-120"/>
+              </a:rPr>
+              <a:t>Linha do tempo do perceptron</a:t>
+            </a:r>
+            <a:endParaRPr lang="en-US" sz="2600" dirty="0"/>
+          </a:p>
+        </p:txBody>
+      </p:sp>
+      <p:sp>
+        <p:nvSpPr>
+          <p:cNvPr id="3" name="Text 1"/>
+          <p:cNvSpPr txBox="1"/>
+          <p:nvPr/>
+        </p:nvSpPr>
+        <p:spPr>
+          <a:xfrm>
+            <a:off x="548640" y="1188720"/>
+            <a:ext cx="8046720" cy="3383280"/>
+          </a:xfrm>
+          <a:prstGeom prst="rect">
+            <a:avLst/>
+          </a:prstGeom>
+          <a:noFill/>
+          <a:ln/>
+        </p:spPr>
+        <p:txBody>
+          <a:bodyPr wrap="square" lIns="0" tIns="0" rIns="0" bIns="0" rtlCol="0" anchor="t">
+            <a:normAutofit/>
+          </a:bodyPr>
+          <a:lstStyle/>
+          <a:p>
+            <a:pPr marL="342900" indent="-342900">
+              <a:spcAft>
+                <a:spcPts val="1400"/>
+              </a:spcAft>
+              <a:buSzPct val="100000"/>
+              <a:buChar char="•"/>
+            </a:pPr>
+            <a:r>
+              <a:rPr lang="en-US" sz="2400" dirty="0">
+                <a:solidFill>
+                  <a:srgbClr val="1F2937"/>
+                </a:solidFill>
+              </a:rPr>
+              <a:t>1943: neurônio de McCulloch e Pitts</a:t>
+            </a:r>
+            <a:endParaRPr lang="en-US" sz="2400" dirty="0"/>
+          </a:p>
+          <a:p>
+            <a:pPr marL="342900" indent="-342900">
+              <a:spcAft>
+                <a:spcPts val="1400"/>
+              </a:spcAft>
+              <a:buSzPct val="100000"/>
+              <a:buChar char="•"/>
+            </a:pPr>
+            <a:r>
+              <a:rPr lang="en-US" sz="2400" dirty="0">
+                <a:solidFill>
+                  <a:srgbClr val="1F2937"/>
+                </a:solidFill>
+              </a:rPr>
+              <a:t>1958: perceptron de Rosenblatt</a:t>
+            </a:r>
+            <a:endParaRPr lang="en-US" sz="2400" dirty="0"/>
+          </a:p>
+          <a:p>
+            <a:pPr marL="342900" indent="-342900">
+              <a:spcAft>
+                <a:spcPts val="1400"/>
+              </a:spcAft>
+              <a:buSzPct val="100000"/>
+              <a:buChar char="•"/>
+            </a:pPr>
+            <a:r>
+              <a:rPr lang="en-US" sz="2400" dirty="0">
+                <a:solidFill>
+                  <a:srgbClr val="1F2937"/>
+                </a:solidFill>
+              </a:rPr>
+              <a:t>1962: prova de convergência (Novikoff)</a:t>
+            </a:r>
+            <a:endParaRPr lang="en-US" sz="2400" dirty="0"/>
+          </a:p>
+          <a:p>
+            <a:pPr marL="342900" indent="-342900">
+              <a:spcAft>
+                <a:spcPts val="1400"/>
+              </a:spcAft>
+              <a:buSzPct val="100000"/>
+              <a:buChar char="•"/>
+            </a:pPr>
+            <a:r>
+              <a:rPr lang="en-US" sz="2400" dirty="0">
+                <a:solidFill>
+                  <a:srgbClr val="1F2937"/>
+                </a:solidFill>
+              </a:rPr>
+              <a:t>1969: Minsky e Papert apontam o limite do XOR</a:t>
+            </a:r>
+            <a:endParaRPr lang="en-US" sz="2400" dirty="0"/>
+          </a:p>
+          <a:p>
+            <a:pPr marL="342900" indent="-342900">
+              <a:spcAft>
+                <a:spcPts val="1400"/>
+              </a:spcAft>
+              <a:buSzPct val="100000"/>
+              <a:buChar char="•"/>
+            </a:pPr>
+            <a:r>
+              <a:rPr lang="en-US" sz="2400" dirty="0">
+                <a:solidFill>
+                  <a:srgbClr val="1F2937"/>
+                </a:solidFill>
+              </a:rPr>
+              <a:t>1986: backpropagation popularizado (Rumelhart et al.)</a:t>
+            </a:r>
+            <a:endParaRPr lang="en-US" sz="2400" dirty="0"/>
+          </a:p>
+        </p:txBody>
+      </p:sp>
+      <p:sp>
+        <p:nvSpPr>
+          <p:cNvPr id="25" name="Slide Number Placeholder 0"/>
+          <p:cNvSpPr>
+            <a:spLocks noGrp="1"/>
+          </p:cNvSpPr>
+          <p:nvPr>
+            <p:ph type="sldNum" sz="quarter" idx="4294967295"/>
+          </p:nvPr>
+        </p:nvSpPr>
+        <p:spPr>
+          <a:xfrm>
+            <a:off x="8412480" y="4828032"/>
+            <a:ext cx="457200" cy="228600"/>
+          </a:xfrm>
+          <a:prstGeom prst="rect">
+            <a:avLst/>
+          </a:prstGeom>
+          <a:extLst>
+            <a:ext uri="{C572A759-6A51-4108-AA02-DFA0A04FC94B}">
+              <ma14:wrappingTextBoxFlag xmlns:ma14="http://schemas.microsoft.com/office/mac/drawingml/2011/main" val="0"/>
+            </a:ext>
+          </a:extLst>
+        </p:spPr>
+        <p:txBody>
+          <a:bodyPr/>
+          <a:lstStyle>
+            <a:lvl1pPr>
+              <a:defRPr sz="900">
+                <a:solidFill>
+                  <a:srgbClr val="6B7280"/>
+                </a:solidFill>
+              </a:defRPr>
+            </a:lvl1pPr>
+          </a:lstStyle>
+          <a:p>
+            <a:pPr algn="l"/>
+            <a:fld id="{F7021451-1387-4CA6-816F-3879F97B5CBC}" type="slidenum">
+              <a:rPr b="0" lang="en-US"/>
+              <a:t>13</a:t>
+            </a:fld>
+            <a:endParaRPr lang="en-US"/>
+          </a:p>
+        </p:txBody>
+      </p:sp>
+    </p:spTree>
+  </p:cSld>
+  <p:clrMapOvr>
+    <a:masterClrMapping/>
+  </p:clrMapOvr>
+</p:sld>
+</file>
+
+<file path=ppt/slides/slide14.xml><?xml version="1.0" encoding="utf-8"?>
+<p:sld xmlns:a="http://schemas.openxmlformats.org/drawingml/2006/main" xmlns:r="http://schemas.openxmlformats.org/officeDocument/2006/relationships" xmlns:p="http://schemas.openxmlformats.org/presentationml/2006/main">
+  <p:cSld name="Slide 14">
+    <p:spTree>
+      <p:nvGrpSpPr>
+        <p:cNvPr id="1" name=""/>
+        <p:cNvGrpSpPr/>
+        <p:nvPr/>
+      </p:nvGrpSpPr>
+      <p:grpSpPr>
+        <a:xfrm>
+          <a:off x="0" y="0"/>
+          <a:ext cx="0" cy="0"/>
+          <a:chOff x="0" y="0"/>
+          <a:chExt cx="0" cy="0"/>
+        </a:xfrm>
+      </p:grpSpPr>
+      <p:sp>
+        <p:nvSpPr>
+          <p:cNvPr id="2" name="Text 0"/>
+          <p:cNvSpPr txBox="1"/>
+          <p:nvPr/>
+        </p:nvSpPr>
+        <p:spPr>
+          <a:xfrm>
+            <a:off x="365760" y="109728"/>
+            <a:ext cx="8412480" cy="658368"/>
+          </a:xfrm>
+          <a:prstGeom prst="rect">
+            <a:avLst/>
+          </a:prstGeom>
+          <a:noFill/>
+          <a:ln/>
+        </p:spPr>
+        <p:txBody>
+          <a:bodyPr wrap="square" lIns="0" tIns="0" rIns="0" bIns="0" rtlCol="0" anchor="ctr">
+            <a:normAutofit/>
+          </a:bodyPr>
+          <a:lstStyle/>
+          <a:p>
+            <a:pPr indent="0" marL="0">
+              <a:buNone/>
+            </a:pPr>
+            <a:r>
+              <a:rPr lang="en-US" sz="2600" b="1" dirty="0">
+                <a:solidFill>
+                  <a:srgbClr val="FFFFFF"/>
+                </a:solidFill>
+                <a:latin typeface="Calibri" pitchFamily="34" charset="0"/>
+                <a:ea typeface="Calibri" pitchFamily="34" charset="-122"/>
+                <a:cs typeface="Calibri" pitchFamily="34" charset="-120"/>
+              </a:rPr>
+              <a:t>Quiz relâmpago 1</a:t>
+            </a:r>
+            <a:endParaRPr lang="en-US" sz="2600" dirty="0"/>
+          </a:p>
+        </p:txBody>
+      </p:sp>
+      <p:sp>
+        <p:nvSpPr>
+          <p:cNvPr id="3" name="Text 1"/>
+          <p:cNvSpPr txBox="1"/>
+          <p:nvPr/>
+        </p:nvSpPr>
+        <p:spPr>
+          <a:xfrm>
+            <a:off x="548640" y="1051560"/>
+            <a:ext cx="8046720" cy="822960"/>
+          </a:xfrm>
+          <a:prstGeom prst="rect">
+            <a:avLst/>
+          </a:prstGeom>
+          <a:noFill/>
+          <a:ln/>
+        </p:spPr>
+        <p:txBody>
+          <a:bodyPr wrap="square" lIns="0" tIns="0" rIns="0" bIns="0" rtlCol="0" anchor="ctr">
+            <a:normAutofit/>
+          </a:bodyPr>
+          <a:lstStyle/>
+          <a:p>
+            <a:pPr indent="0" marL="0">
+              <a:buNone/>
+            </a:pPr>
+            <a:r>
+              <a:rPr lang="en-US" sz="2200" b="1" dirty="0">
+                <a:solidFill>
+                  <a:srgbClr val="312E81"/>
+                </a:solidFill>
+              </a:rPr>
+              <a:t>Qual porta lógica um perceptron de um neurônio NÃO consegue aprender?</a:t>
+            </a:r>
+            <a:endParaRPr lang="en-US" sz="2200" dirty="0"/>
+          </a:p>
+        </p:txBody>
+      </p:sp>
+      <p:sp>
+        <p:nvSpPr>
+          <p:cNvPr id="4" name="Shape 2"/>
+          <p:cNvSpPr/>
+          <p:nvPr/>
+        </p:nvSpPr>
+        <p:spPr>
+          <a:xfrm>
+            <a:off x="548640" y="1965960"/>
+            <a:ext cx="8046720" cy="548640"/>
+          </a:xfrm>
+          <a:prstGeom prst="roundRect">
+            <a:avLst>
+              <a:gd name="adj" fmla="val 13333"/>
+            </a:avLst>
+          </a:prstGeom>
+          <a:solidFill>
+            <a:srgbClr val="EEF2FF"/>
+          </a:solidFill>
+          <a:ln w="12700">
+            <a:solidFill>
+              <a:srgbClr val="C7D2FE"/>
+            </a:solidFill>
+            <a:prstDash val="solid"/>
+          </a:ln>
+        </p:spPr>
+      </p:sp>
+      <p:sp>
+        <p:nvSpPr>
+          <p:cNvPr id="5" name="Text 3"/>
+          <p:cNvSpPr txBox="1"/>
+          <p:nvPr/>
+        </p:nvSpPr>
+        <p:spPr>
+          <a:xfrm>
+            <a:off x="777240" y="1965960"/>
+            <a:ext cx="7680960" cy="548640"/>
+          </a:xfrm>
+          <a:prstGeom prst="rect">
+            <a:avLst/>
+          </a:prstGeom>
+          <a:noFill/>
+          <a:ln/>
+        </p:spPr>
+        <p:txBody>
+          <a:bodyPr wrap="square" lIns="0" tIns="0" rIns="0" bIns="0" rtlCol="0" anchor="ctr">
+            <a:normAutofit/>
+          </a:bodyPr>
+          <a:lstStyle/>
+          <a:p>
+            <a:pPr indent="0" marL="0">
+              <a:buNone/>
+            </a:pPr>
+            <a:r>
+              <a:rPr lang="en-US" sz="1800" dirty="0">
+                <a:solidFill>
+                  <a:srgbClr val="1F2937"/>
+                </a:solidFill>
+              </a:rPr>
+              <a:t>A)  AND</a:t>
+            </a:r>
+            <a:endParaRPr lang="en-US" sz="1800" dirty="0"/>
+          </a:p>
+        </p:txBody>
+      </p:sp>
+      <p:sp>
+        <p:nvSpPr>
+          <p:cNvPr id="6" name="Shape 4"/>
+          <p:cNvSpPr/>
+          <p:nvPr/>
+        </p:nvSpPr>
+        <p:spPr>
+          <a:xfrm>
+            <a:off x="548640" y="2606040"/>
+            <a:ext cx="8046720" cy="548640"/>
+          </a:xfrm>
+          <a:prstGeom prst="roundRect">
+            <a:avLst>
+              <a:gd name="adj" fmla="val 13333"/>
+            </a:avLst>
+          </a:prstGeom>
+          <a:solidFill>
+            <a:srgbClr val="EEF2FF"/>
+          </a:solidFill>
+          <a:ln w="12700">
+            <a:solidFill>
+              <a:srgbClr val="C7D2FE"/>
+            </a:solidFill>
+            <a:prstDash val="solid"/>
+          </a:ln>
+        </p:spPr>
+      </p:sp>
+      <p:sp>
+        <p:nvSpPr>
+          <p:cNvPr id="7" name="Text 5"/>
+          <p:cNvSpPr txBox="1"/>
+          <p:nvPr/>
+        </p:nvSpPr>
+        <p:spPr>
+          <a:xfrm>
+            <a:off x="777240" y="2606040"/>
+            <a:ext cx="7680960" cy="548640"/>
+          </a:xfrm>
+          <a:prstGeom prst="rect">
+            <a:avLst/>
+          </a:prstGeom>
+          <a:noFill/>
+          <a:ln/>
+        </p:spPr>
+        <p:txBody>
+          <a:bodyPr wrap="square" lIns="0" tIns="0" rIns="0" bIns="0" rtlCol="0" anchor="ctr">
+            <a:normAutofit/>
+          </a:bodyPr>
+          <a:lstStyle/>
+          <a:p>
+            <a:pPr indent="0" marL="0">
+              <a:buNone/>
+            </a:pPr>
+            <a:r>
+              <a:rPr lang="en-US" sz="1800" dirty="0">
+                <a:solidFill>
+                  <a:srgbClr val="1F2937"/>
+                </a:solidFill>
+              </a:rPr>
+              <a:t>B)  OR</a:t>
+            </a:r>
+            <a:endParaRPr lang="en-US" sz="1800" dirty="0"/>
+          </a:p>
+        </p:txBody>
+      </p:sp>
+      <p:sp>
+        <p:nvSpPr>
+          <p:cNvPr id="8" name="Shape 6"/>
+          <p:cNvSpPr/>
+          <p:nvPr/>
+        </p:nvSpPr>
+        <p:spPr>
+          <a:xfrm>
+            <a:off x="548640" y="3246120"/>
+            <a:ext cx="8046720" cy="548640"/>
+          </a:xfrm>
+          <a:prstGeom prst="roundRect">
+            <a:avLst>
+              <a:gd name="adj" fmla="val 13333"/>
+            </a:avLst>
+          </a:prstGeom>
+          <a:solidFill>
+            <a:srgbClr val="EEF2FF"/>
+          </a:solidFill>
+          <a:ln w="12700">
+            <a:solidFill>
+              <a:srgbClr val="C7D2FE"/>
+            </a:solidFill>
+            <a:prstDash val="solid"/>
+          </a:ln>
+        </p:spPr>
+      </p:sp>
+      <p:sp>
+        <p:nvSpPr>
+          <p:cNvPr id="9" name="Text 7"/>
+          <p:cNvSpPr txBox="1"/>
+          <p:nvPr/>
+        </p:nvSpPr>
+        <p:spPr>
+          <a:xfrm>
+            <a:off x="777240" y="3246120"/>
+            <a:ext cx="7680960" cy="548640"/>
+          </a:xfrm>
+          <a:prstGeom prst="rect">
+            <a:avLst/>
+          </a:prstGeom>
+          <a:noFill/>
+          <a:ln/>
+        </p:spPr>
+        <p:txBody>
+          <a:bodyPr wrap="square" lIns="0" tIns="0" rIns="0" bIns="0" rtlCol="0" anchor="ctr">
+            <a:normAutofit/>
+          </a:bodyPr>
+          <a:lstStyle/>
+          <a:p>
+            <a:pPr indent="0" marL="0">
+              <a:buNone/>
+            </a:pPr>
+            <a:r>
+              <a:rPr lang="en-US" sz="1800" dirty="0">
+                <a:solidFill>
+                  <a:srgbClr val="1F2937"/>
+                </a:solidFill>
+              </a:rPr>
+              <a:t>C)  NOT</a:t>
+            </a:r>
+            <a:endParaRPr lang="en-US" sz="1800" dirty="0"/>
+          </a:p>
+        </p:txBody>
+      </p:sp>
+      <p:sp>
+        <p:nvSpPr>
+          <p:cNvPr id="10" name="Shape 8"/>
+          <p:cNvSpPr/>
+          <p:nvPr/>
+        </p:nvSpPr>
+        <p:spPr>
+          <a:xfrm>
+            <a:off x="548640" y="3886200"/>
+            <a:ext cx="8046720" cy="548640"/>
+          </a:xfrm>
+          <a:prstGeom prst="roundRect">
+            <a:avLst>
+              <a:gd name="adj" fmla="val 13333"/>
+            </a:avLst>
+          </a:prstGeom>
+          <a:solidFill>
+            <a:srgbClr val="EEF2FF"/>
+          </a:solidFill>
+          <a:ln w="12700">
+            <a:solidFill>
+              <a:srgbClr val="C7D2FE"/>
+            </a:solidFill>
+            <a:prstDash val="solid"/>
+          </a:ln>
+        </p:spPr>
+      </p:sp>
+      <p:sp>
+        <p:nvSpPr>
+          <p:cNvPr id="11" name="Text 9"/>
+          <p:cNvSpPr txBox="1"/>
+          <p:nvPr/>
+        </p:nvSpPr>
+        <p:spPr>
+          <a:xfrm>
+            <a:off x="777240" y="3886200"/>
+            <a:ext cx="7680960" cy="548640"/>
+          </a:xfrm>
+          <a:prstGeom prst="rect">
+            <a:avLst/>
+          </a:prstGeom>
+          <a:noFill/>
+          <a:ln/>
+        </p:spPr>
+        <p:txBody>
+          <a:bodyPr wrap="square" lIns="0" tIns="0" rIns="0" bIns="0" rtlCol="0" anchor="ctr">
+            <a:normAutofit/>
+          </a:bodyPr>
+          <a:lstStyle/>
+          <a:p>
+            <a:pPr indent="0" marL="0">
+              <a:buNone/>
+            </a:pPr>
+            <a:r>
+              <a:rPr lang="en-US" sz="1800" dirty="0">
+                <a:solidFill>
+                  <a:srgbClr val="1F2937"/>
+                </a:solidFill>
+              </a:rPr>
+              <a:t>D)  XOR</a:t>
+            </a:r>
+            <a:endParaRPr lang="en-US" sz="1800" dirty="0"/>
+          </a:p>
+        </p:txBody>
+      </p:sp>
+      <p:sp>
+        <p:nvSpPr>
+          <p:cNvPr id="25" name="Slide Number Placeholder 0"/>
+          <p:cNvSpPr>
+            <a:spLocks noGrp="1"/>
+          </p:cNvSpPr>
+          <p:nvPr>
+            <p:ph type="sldNum" sz="quarter" idx="4294967295"/>
+          </p:nvPr>
+        </p:nvSpPr>
+        <p:spPr>
+          <a:xfrm>
+            <a:off x="8412480" y="4828032"/>
+            <a:ext cx="457200" cy="228600"/>
+          </a:xfrm>
+          <a:prstGeom prst="rect">
+            <a:avLst/>
+          </a:prstGeom>
+          <a:extLst>
+            <a:ext uri="{C572A759-6A51-4108-AA02-DFA0A04FC94B}">
+              <ma14:wrappingTextBoxFlag xmlns:ma14="http://schemas.microsoft.com/office/mac/drawingml/2011/main" val="0"/>
+            </a:ext>
+          </a:extLst>
+        </p:spPr>
+        <p:txBody>
+          <a:bodyPr/>
+          <a:lstStyle>
+            <a:lvl1pPr>
+              <a:defRPr sz="900">
+                <a:solidFill>
+                  <a:srgbClr val="6B7280"/>
+                </a:solidFill>
+              </a:defRPr>
+            </a:lvl1pPr>
+          </a:lstStyle>
+          <a:p>
+            <a:pPr algn="l"/>
+            <a:fld id="{F7021451-1387-4CA6-816F-3879F97B5CBC}" type="slidenum">
+              <a:rPr b="0" lang="en-US"/>
+              <a:t>14</a:t>
+            </a:fld>
+            <a:endParaRPr lang="en-US"/>
+          </a:p>
+        </p:txBody>
+      </p:sp>
+    </p:spTree>
+  </p:cSld>
+  <p:clrMapOvr>
+    <a:masterClrMapping/>
+  </p:clrMapOvr>
+</p:sld>
+</file>
+
+<file path=ppt/slides/slide15.xml><?xml version="1.0" encoding="utf-8"?>
+<p:sld xmlns:a="http://schemas.openxmlformats.org/drawingml/2006/main" xmlns:r="http://schemas.openxmlformats.org/officeDocument/2006/relationships" xmlns:p="http://schemas.openxmlformats.org/presentationml/2006/main">
+  <p:cSld name="Slide 15">
+    <p:spTree>
+      <p:nvGrpSpPr>
+        <p:cNvPr id="1" name=""/>
+        <p:cNvGrpSpPr/>
+        <p:nvPr/>
+      </p:nvGrpSpPr>
+      <p:grpSpPr>
+        <a:xfrm>
+          <a:off x="0" y="0"/>
+          <a:ext cx="0" cy="0"/>
+          <a:chOff x="0" y="0"/>
+          <a:chExt cx="0" cy="0"/>
+        </a:xfrm>
+      </p:grpSpPr>
+      <p:sp>
+        <p:nvSpPr>
+          <p:cNvPr id="2" name="Text 0"/>
+          <p:cNvSpPr txBox="1"/>
+          <p:nvPr/>
+        </p:nvSpPr>
+        <p:spPr>
+          <a:xfrm>
+            <a:off x="365760" y="109728"/>
+            <a:ext cx="8412480" cy="658368"/>
+          </a:xfrm>
+          <a:prstGeom prst="rect">
+            <a:avLst/>
+          </a:prstGeom>
+          <a:noFill/>
+          <a:ln/>
+        </p:spPr>
+        <p:txBody>
+          <a:bodyPr wrap="square" lIns="0" tIns="0" rIns="0" bIns="0" rtlCol="0" anchor="ctr">
+            <a:normAutofit/>
+          </a:bodyPr>
+          <a:lstStyle/>
+          <a:p>
+            <a:pPr indent="0" marL="0">
+              <a:buNone/>
+            </a:pPr>
+            <a:r>
+              <a:rPr lang="en-US" sz="2600" b="1" dirty="0">
+                <a:solidFill>
+                  <a:srgbClr val="FFFFFF"/>
+                </a:solidFill>
+                <a:latin typeface="Calibri" pitchFamily="34" charset="0"/>
+                <a:ea typeface="Calibri" pitchFamily="34" charset="-122"/>
+                <a:cs typeface="Calibri" pitchFamily="34" charset="-120"/>
+              </a:rPr>
+              <a:t>Quiz relâmpago 2</a:t>
+            </a:r>
+            <a:endParaRPr lang="en-US" sz="2600" dirty="0"/>
+          </a:p>
+        </p:txBody>
+      </p:sp>
+      <p:sp>
+        <p:nvSpPr>
+          <p:cNvPr id="3" name="Text 1"/>
+          <p:cNvSpPr txBox="1"/>
+          <p:nvPr/>
+        </p:nvSpPr>
+        <p:spPr>
+          <a:xfrm>
+            <a:off x="548640" y="1051560"/>
+            <a:ext cx="8046720" cy="822960"/>
+          </a:xfrm>
+          <a:prstGeom prst="rect">
+            <a:avLst/>
+          </a:prstGeom>
+          <a:noFill/>
+          <a:ln/>
+        </p:spPr>
+        <p:txBody>
+          <a:bodyPr wrap="square" lIns="0" tIns="0" rIns="0" bIns="0" rtlCol="0" anchor="ctr">
+            <a:normAutofit/>
+          </a:bodyPr>
+          <a:lstStyle/>
+          <a:p>
+            <a:pPr indent="0" marL="0">
+              <a:buNone/>
+            </a:pPr>
+            <a:r>
+              <a:rPr lang="en-US" sz="2200" b="1" dirty="0">
+                <a:solidFill>
+                  <a:srgbClr val="312E81"/>
+                </a:solidFill>
+              </a:rPr>
+              <a:t>Quando o perceptron atualiza os pesos?</a:t>
+            </a:r>
+            <a:endParaRPr lang="en-US" sz="2200" dirty="0"/>
+          </a:p>
+        </p:txBody>
+      </p:sp>
+      <p:sp>
+        <p:nvSpPr>
+          <p:cNvPr id="4" name="Shape 2"/>
+          <p:cNvSpPr/>
+          <p:nvPr/>
+        </p:nvSpPr>
+        <p:spPr>
+          <a:xfrm>
+            <a:off x="548640" y="1965960"/>
+            <a:ext cx="8046720" cy="548640"/>
+          </a:xfrm>
+          <a:prstGeom prst="roundRect">
+            <a:avLst>
+              <a:gd name="adj" fmla="val 13333"/>
+            </a:avLst>
+          </a:prstGeom>
+          <a:solidFill>
+            <a:srgbClr val="EEF2FF"/>
+          </a:solidFill>
+          <a:ln w="12700">
+            <a:solidFill>
+              <a:srgbClr val="C7D2FE"/>
+            </a:solidFill>
+            <a:prstDash val="solid"/>
+          </a:ln>
+        </p:spPr>
+      </p:sp>
+      <p:sp>
+        <p:nvSpPr>
+          <p:cNvPr id="5" name="Text 3"/>
+          <p:cNvSpPr txBox="1"/>
+          <p:nvPr/>
+        </p:nvSpPr>
+        <p:spPr>
+          <a:xfrm>
+            <a:off x="777240" y="1965960"/>
+            <a:ext cx="7680960" cy="548640"/>
+          </a:xfrm>
+          <a:prstGeom prst="rect">
+            <a:avLst/>
+          </a:prstGeom>
+          <a:noFill/>
+          <a:ln/>
+        </p:spPr>
+        <p:txBody>
+          <a:bodyPr wrap="square" lIns="0" tIns="0" rIns="0" bIns="0" rtlCol="0" anchor="ctr">
+            <a:normAutofit/>
+          </a:bodyPr>
+          <a:lstStyle/>
+          <a:p>
+            <a:pPr indent="0" marL="0">
+              <a:buNone/>
+            </a:pPr>
+            <a:r>
+              <a:rPr lang="en-US" sz="1800" dirty="0">
+                <a:solidFill>
+                  <a:srgbClr val="1F2937"/>
+                </a:solidFill>
+              </a:rPr>
+              <a:t>A)  Somente quando erra</a:t>
+            </a:r>
+            <a:endParaRPr lang="en-US" sz="1800" dirty="0"/>
+          </a:p>
+        </p:txBody>
+      </p:sp>
+      <p:sp>
+        <p:nvSpPr>
+          <p:cNvPr id="6" name="Shape 4"/>
+          <p:cNvSpPr/>
+          <p:nvPr/>
+        </p:nvSpPr>
+        <p:spPr>
+          <a:xfrm>
+            <a:off x="548640" y="2606040"/>
+            <a:ext cx="8046720" cy="548640"/>
+          </a:xfrm>
+          <a:prstGeom prst="roundRect">
+            <a:avLst>
+              <a:gd name="adj" fmla="val 13333"/>
+            </a:avLst>
+          </a:prstGeom>
+          <a:solidFill>
+            <a:srgbClr val="EEF2FF"/>
+          </a:solidFill>
+          <a:ln w="12700">
+            <a:solidFill>
+              <a:srgbClr val="C7D2FE"/>
+            </a:solidFill>
+            <a:prstDash val="solid"/>
+          </a:ln>
+        </p:spPr>
+      </p:sp>
+      <p:sp>
+        <p:nvSpPr>
+          <p:cNvPr id="7" name="Text 5"/>
+          <p:cNvSpPr txBox="1"/>
+          <p:nvPr/>
+        </p:nvSpPr>
+        <p:spPr>
+          <a:xfrm>
+            <a:off x="777240" y="2606040"/>
+            <a:ext cx="7680960" cy="548640"/>
+          </a:xfrm>
+          <a:prstGeom prst="rect">
+            <a:avLst/>
+          </a:prstGeom>
+          <a:noFill/>
+          <a:ln/>
+        </p:spPr>
+        <p:txBody>
+          <a:bodyPr wrap="square" lIns="0" tIns="0" rIns="0" bIns="0" rtlCol="0" anchor="ctr">
+            <a:normAutofit/>
+          </a:bodyPr>
+          <a:lstStyle/>
+          <a:p>
+            <a:pPr indent="0" marL="0">
+              <a:buNone/>
+            </a:pPr>
+            <a:r>
+              <a:rPr lang="en-US" sz="1800" dirty="0">
+                <a:solidFill>
+                  <a:srgbClr val="1F2937"/>
+                </a:solidFill>
+              </a:rPr>
+              <a:t>B)  A cada amostra, sempre</a:t>
+            </a:r>
+            <a:endParaRPr lang="en-US" sz="1800" dirty="0"/>
+          </a:p>
+        </p:txBody>
+      </p:sp>
+      <p:sp>
+        <p:nvSpPr>
+          <p:cNvPr id="8" name="Shape 6"/>
+          <p:cNvSpPr/>
+          <p:nvPr/>
+        </p:nvSpPr>
+        <p:spPr>
+          <a:xfrm>
+            <a:off x="548640" y="3246120"/>
+            <a:ext cx="8046720" cy="548640"/>
+          </a:xfrm>
+          <a:prstGeom prst="roundRect">
+            <a:avLst>
+              <a:gd name="adj" fmla="val 13333"/>
+            </a:avLst>
+          </a:prstGeom>
+          <a:solidFill>
+            <a:srgbClr val="EEF2FF"/>
+          </a:solidFill>
+          <a:ln w="12700">
+            <a:solidFill>
+              <a:srgbClr val="C7D2FE"/>
+            </a:solidFill>
+            <a:prstDash val="solid"/>
+          </a:ln>
+        </p:spPr>
+      </p:sp>
+      <p:sp>
+        <p:nvSpPr>
+          <p:cNvPr id="9" name="Text 7"/>
+          <p:cNvSpPr txBox="1"/>
+          <p:nvPr/>
+        </p:nvSpPr>
+        <p:spPr>
+          <a:xfrm>
+            <a:off x="777240" y="3246120"/>
+            <a:ext cx="7680960" cy="548640"/>
+          </a:xfrm>
+          <a:prstGeom prst="rect">
+            <a:avLst/>
+          </a:prstGeom>
+          <a:noFill/>
+          <a:ln/>
+        </p:spPr>
+        <p:txBody>
+          <a:bodyPr wrap="square" lIns="0" tIns="0" rIns="0" bIns="0" rtlCol="0" anchor="ctr">
+            <a:normAutofit/>
+          </a:bodyPr>
+          <a:lstStyle/>
+          <a:p>
+            <a:pPr indent="0" marL="0">
+              <a:buNone/>
+            </a:pPr>
+            <a:r>
+              <a:rPr lang="en-US" sz="1800" dirty="0">
+                <a:solidFill>
+                  <a:srgbClr val="1F2937"/>
+                </a:solidFill>
+              </a:rPr>
+              <a:t>C)  Só no fim da época</a:t>
+            </a:r>
+            <a:endParaRPr lang="en-US" sz="1800" dirty="0"/>
+          </a:p>
+        </p:txBody>
+      </p:sp>
+      <p:sp>
+        <p:nvSpPr>
+          <p:cNvPr id="10" name="Shape 8"/>
+          <p:cNvSpPr/>
+          <p:nvPr/>
+        </p:nvSpPr>
+        <p:spPr>
+          <a:xfrm>
+            <a:off x="548640" y="3886200"/>
+            <a:ext cx="8046720" cy="548640"/>
+          </a:xfrm>
+          <a:prstGeom prst="roundRect">
+            <a:avLst>
+              <a:gd name="adj" fmla="val 13333"/>
+            </a:avLst>
+          </a:prstGeom>
+          <a:solidFill>
+            <a:srgbClr val="EEF2FF"/>
+          </a:solidFill>
+          <a:ln w="12700">
+            <a:solidFill>
+              <a:srgbClr val="C7D2FE"/>
+            </a:solidFill>
+            <a:prstDash val="solid"/>
+          </a:ln>
+        </p:spPr>
+      </p:sp>
+      <p:sp>
+        <p:nvSpPr>
+          <p:cNvPr id="11" name="Text 9"/>
+          <p:cNvSpPr txBox="1"/>
+          <p:nvPr/>
+        </p:nvSpPr>
+        <p:spPr>
+          <a:xfrm>
+            <a:off x="777240" y="3886200"/>
+            <a:ext cx="7680960" cy="548640"/>
+          </a:xfrm>
+          <a:prstGeom prst="rect">
+            <a:avLst/>
+          </a:prstGeom>
+          <a:noFill/>
+          <a:ln/>
+        </p:spPr>
+        <p:txBody>
+          <a:bodyPr wrap="square" lIns="0" tIns="0" rIns="0" bIns="0" rtlCol="0" anchor="ctr">
+            <a:normAutofit/>
+          </a:bodyPr>
+          <a:lstStyle/>
+          <a:p>
+            <a:pPr indent="0" marL="0">
+              <a:buNone/>
+            </a:pPr>
+            <a:r>
+              <a:rPr lang="en-US" sz="1800" dirty="0">
+                <a:solidFill>
+                  <a:srgbClr val="1F2937"/>
+                </a:solidFill>
+              </a:rPr>
+              <a:t>D)  Só quando acerta</a:t>
+            </a:r>
+            <a:endParaRPr lang="en-US" sz="1800" dirty="0"/>
+          </a:p>
+        </p:txBody>
+      </p:sp>
+      <p:sp>
+        <p:nvSpPr>
+          <p:cNvPr id="25" name="Slide Number Placeholder 0"/>
+          <p:cNvSpPr>
+            <a:spLocks noGrp="1"/>
+          </p:cNvSpPr>
+          <p:nvPr>
+            <p:ph type="sldNum" sz="quarter" idx="4294967295"/>
+          </p:nvPr>
+        </p:nvSpPr>
+        <p:spPr>
+          <a:xfrm>
+            <a:off x="8412480" y="4828032"/>
+            <a:ext cx="457200" cy="228600"/>
+          </a:xfrm>
+          <a:prstGeom prst="rect">
+            <a:avLst/>
+          </a:prstGeom>
+          <a:extLst>
+            <a:ext uri="{C572A759-6A51-4108-AA02-DFA0A04FC94B}">
+              <ma14:wrappingTextBoxFlag xmlns:ma14="http://schemas.microsoft.com/office/mac/drawingml/2011/main" val="0"/>
+            </a:ext>
+          </a:extLst>
+        </p:spPr>
+        <p:txBody>
+          <a:bodyPr/>
+          <a:lstStyle>
+            <a:lvl1pPr>
+              <a:defRPr sz="900">
+                <a:solidFill>
+                  <a:srgbClr val="6B7280"/>
+                </a:solidFill>
+              </a:defRPr>
+            </a:lvl1pPr>
+          </a:lstStyle>
+          <a:p>
+            <a:pPr algn="l"/>
+            <a:fld id="{F7021451-1387-4CA6-816F-3879F97B5CBC}" type="slidenum">
+              <a:rPr b="0" lang="en-US"/>
+              <a:t>15</a:t>
+            </a:fld>
+            <a:endParaRPr lang="en-US"/>
+          </a:p>
+        </p:txBody>
+      </p:sp>
+    </p:spTree>
+  </p:cSld>
+  <p:clrMapOvr>
+    <a:masterClrMapping/>
+  </p:clrMapOvr>
+</p:sld>
+</file>
+
+<file path=ppt/slides/slide16.xml><?xml version="1.0" encoding="utf-8"?>
+<p:sld xmlns:a="http://schemas.openxmlformats.org/drawingml/2006/main" xmlns:r="http://schemas.openxmlformats.org/officeDocument/2006/relationships" xmlns:p="http://schemas.openxmlformats.org/presentationml/2006/main">
+  <p:cSld name="Slide 16">
+    <p:spTree>
+      <p:nvGrpSpPr>
+        <p:cNvPr id="1" name=""/>
+        <p:cNvGrpSpPr/>
+        <p:nvPr/>
+      </p:nvGrpSpPr>
+      <p:grpSpPr>
+        <a:xfrm>
+          <a:off x="0" y="0"/>
+          <a:ext cx="0" cy="0"/>
+          <a:chOff x="0" y="0"/>
+          <a:chExt cx="0" cy="0"/>
+        </a:xfrm>
+      </p:grpSpPr>
+      <p:sp>
+        <p:nvSpPr>
+          <p:cNvPr id="2" name="Text 0"/>
+          <p:cNvSpPr txBox="1"/>
+          <p:nvPr/>
+        </p:nvSpPr>
+        <p:spPr>
+          <a:xfrm>
+            <a:off x="365760" y="109728"/>
+            <a:ext cx="8412480" cy="658368"/>
+          </a:xfrm>
+          <a:prstGeom prst="rect">
+            <a:avLst/>
+          </a:prstGeom>
+          <a:noFill/>
+          <a:ln/>
+        </p:spPr>
+        <p:txBody>
+          <a:bodyPr wrap="square" lIns="0" tIns="0" rIns="0" bIns="0" rtlCol="0" anchor="ctr">
+            <a:normAutofit/>
+          </a:bodyPr>
+          <a:lstStyle/>
+          <a:p>
+            <a:pPr indent="0" marL="0">
+              <a:buNone/>
+            </a:pPr>
+            <a:r>
+              <a:rPr lang="en-US" sz="2600" b="1" dirty="0">
+                <a:solidFill>
+                  <a:srgbClr val="FFFFFF"/>
+                </a:solidFill>
+                <a:latin typeface="Calibri" pitchFamily="34" charset="0"/>
+                <a:ea typeface="Calibri" pitchFamily="34" charset="-122"/>
+                <a:cs typeface="Calibri" pitchFamily="34" charset="-120"/>
+              </a:rPr>
+              <a:t>Atividade</a:t>
+            </a:r>
+            <a:endParaRPr lang="en-US" sz="2600" dirty="0"/>
+          </a:p>
+        </p:txBody>
+      </p:sp>
+      <p:sp>
+        <p:nvSpPr>
+          <p:cNvPr id="3" name="Shape 1"/>
+          <p:cNvSpPr/>
+          <p:nvPr/>
+        </p:nvSpPr>
+        <p:spPr>
+          <a:xfrm>
+            <a:off x="548640" y="1188720"/>
+            <a:ext cx="8046720" cy="3108960"/>
+          </a:xfrm>
+          <a:prstGeom prst="roundRect">
+            <a:avLst>
+              <a:gd name="adj" fmla="val 3529"/>
+            </a:avLst>
+          </a:prstGeom>
+          <a:solidFill>
+            <a:srgbClr val="FFFBEB"/>
+          </a:solidFill>
+          <a:ln w="25400">
+            <a:solidFill>
+              <a:srgbClr val="F59E0B"/>
+            </a:solidFill>
+            <a:prstDash val="solid"/>
+          </a:ln>
+        </p:spPr>
+      </p:sp>
+      <p:sp>
+        <p:nvSpPr>
+          <p:cNvPr id="4" name="Text 2"/>
+          <p:cNvSpPr txBox="1"/>
+          <p:nvPr/>
+        </p:nvSpPr>
+        <p:spPr>
+          <a:xfrm>
+            <a:off x="822960" y="1325880"/>
+            <a:ext cx="3657600" cy="365760"/>
+          </a:xfrm>
+          <a:prstGeom prst="rect">
+            <a:avLst/>
+          </a:prstGeom>
+          <a:noFill/>
+          <a:ln/>
+        </p:spPr>
+        <p:txBody>
+          <a:bodyPr wrap="square" lIns="0" tIns="0" rIns="0" bIns="0" rtlCol="0" anchor="ctr"/>
+          <a:lstStyle/>
+          <a:p>
+            <a:pPr indent="0" marL="0">
+              <a:buNone/>
+            </a:pPr>
+            <a:r>
+              <a:rPr lang="en-US" sz="1400" b="1" spc="300" kern="0" dirty="0">
+                <a:solidFill>
+                  <a:srgbClr val="B45309"/>
+                </a:solidFill>
+              </a:rPr>
+              <a:t>MÃO NA MASSA</a:t>
+            </a:r>
+            <a:endParaRPr lang="en-US" sz="1400" dirty="0"/>
+          </a:p>
+        </p:txBody>
+      </p:sp>
+      <p:sp>
+        <p:nvSpPr>
+          <p:cNvPr id="5" name="Text 3"/>
+          <p:cNvSpPr txBox="1"/>
+          <p:nvPr/>
+        </p:nvSpPr>
+        <p:spPr>
+          <a:xfrm>
+            <a:off x="822960" y="1783080"/>
+            <a:ext cx="7498080" cy="2377440"/>
+          </a:xfrm>
+          <a:prstGeom prst="rect">
+            <a:avLst/>
+          </a:prstGeom>
+          <a:noFill/>
+          <a:ln/>
+        </p:spPr>
+        <p:txBody>
+          <a:bodyPr wrap="square" lIns="0" tIns="0" rIns="0" bIns="0" rtlCol="0" anchor="t">
+            <a:normAutofit/>
+          </a:bodyPr>
+          <a:lstStyle/>
+          <a:p>
+            <a:pPr indent="0" marL="0">
+              <a:buNone/>
+            </a:pPr>
+            <a:r>
+              <a:rPr lang="en-US" sz="2100" dirty="0">
+                <a:solidFill>
+                  <a:srgbClr val="1F2937"/>
+                </a:solidFill>
+              </a:rPr>
+              <a:t>Treine um perceptron para a porta OR com w = (0, 0), b = 0, η = 1. Escreva os pesos após cada época até a convergência. Depois tente o XOR e explique o que aconteceu.</a:t>
+            </a:r>
+            <a:endParaRPr lang="en-US" sz="2100" dirty="0"/>
+          </a:p>
+        </p:txBody>
+      </p:sp>
+      <p:sp>
+        <p:nvSpPr>
+          <p:cNvPr id="25" name="Slide Number Placeholder 0"/>
+          <p:cNvSpPr>
+            <a:spLocks noGrp="1"/>
+          </p:cNvSpPr>
+          <p:nvPr>
+            <p:ph type="sldNum" sz="quarter" idx="4294967295"/>
+          </p:nvPr>
+        </p:nvSpPr>
+        <p:spPr>
+          <a:xfrm>
+            <a:off x="8412480" y="4828032"/>
+            <a:ext cx="457200" cy="228600"/>
+          </a:xfrm>
+          <a:prstGeom prst="rect">
+            <a:avLst/>
+          </a:prstGeom>
+          <a:extLst>
+            <a:ext uri="{C572A759-6A51-4108-AA02-DFA0A04FC94B}">
+              <ma14:wrappingTextBoxFlag xmlns:ma14="http://schemas.microsoft.com/office/mac/drawingml/2011/main" val="0"/>
+            </a:ext>
+          </a:extLst>
+        </p:spPr>
+        <p:txBody>
+          <a:bodyPr/>
+          <a:lstStyle>
+            <a:lvl1pPr>
+              <a:defRPr sz="900">
+                <a:solidFill>
+                  <a:srgbClr val="6B7280"/>
+                </a:solidFill>
+              </a:defRPr>
+            </a:lvl1pPr>
+          </a:lstStyle>
+          <a:p>
+            <a:pPr algn="l"/>
+            <a:fld id="{F7021451-1387-4CA6-816F-3879F97B5CBC}" type="slidenum">
+              <a:rPr b="0" lang="en-US"/>
+              <a:t>16</a:t>
+            </a:fld>
+            <a:endParaRPr lang="en-US"/>
+          </a:p>
+        </p:txBody>
+      </p:sp>
+    </p:spTree>
+  </p:cSld>
+  <p:clrMapOvr>
+    <a:masterClrMapping/>
+  </p:clrMapOvr>
+</p:sld>
+</file>
+
+<file path=ppt/slides/slide17.xml><?xml version="1.0" encoding="utf-8"?>
+<p:sld xmlns:a="http://schemas.openxmlformats.org/drawingml/2006/main" xmlns:r="http://schemas.openxmlformats.org/officeDocument/2006/relationships" xmlns:p="http://schemas.openxmlformats.org/presentationml/2006/main">
+  <p:cSld name="Slide 17">
+    <p:spTree>
+      <p:nvGrpSpPr>
+        <p:cNvPr id="1" name=""/>
+        <p:cNvGrpSpPr/>
+        <p:nvPr/>
+      </p:nvGrpSpPr>
+      <p:grpSpPr>
+        <a:xfrm>
+          <a:off x="0" y="0"/>
+          <a:ext cx="0" cy="0"/>
+          <a:chOff x="0" y="0"/>
+          <a:chExt cx="0" cy="0"/>
+        </a:xfrm>
+      </p:grpSpPr>
+      <p:sp>
+        <p:nvSpPr>
+          <p:cNvPr id="2" name="Text 0"/>
+          <p:cNvSpPr txBox="1"/>
+          <p:nvPr/>
+        </p:nvSpPr>
+        <p:spPr>
+          <a:xfrm>
             <a:off x="640080" y="457200"/>
             <a:ext cx="7863840" cy="731520"/>
           </a:xfrm>
@@ -2801,6 +4724,130 @@
               <a:t>Treinar camadas ocultas: backpropagation</a:t>
             </a:r>
             <a:endParaRPr lang="en-US" sz="2200" dirty="0"/>
+          </a:p>
+        </p:txBody>
+      </p:sp>
+    </p:spTree>
+  </p:cSld>
+  <p:clrMapOvr>
+    <a:masterClrMapping/>
+  </p:clrMapOvr>
+</p:sld>
+</file>
+
+<file path=ppt/slides/slide18.xml><?xml version="1.0" encoding="utf-8"?>
+<p:sld xmlns:a="http://schemas.openxmlformats.org/drawingml/2006/main" xmlns:r="http://schemas.openxmlformats.org/officeDocument/2006/relationships" xmlns:p="http://schemas.openxmlformats.org/presentationml/2006/main">
+  <p:cSld name="Slide 18">
+    <p:spTree>
+      <p:nvGrpSpPr>
+        <p:cNvPr id="1" name=""/>
+        <p:cNvGrpSpPr/>
+        <p:nvPr/>
+      </p:nvGrpSpPr>
+      <p:grpSpPr>
+        <a:xfrm>
+          <a:off x="0" y="0"/>
+          <a:ext cx="0" cy="0"/>
+          <a:chOff x="0" y="0"/>
+          <a:chExt cx="0" cy="0"/>
+        </a:xfrm>
+      </p:grpSpPr>
+      <p:sp>
+        <p:nvSpPr>
+          <p:cNvPr id="2" name="Shape 0"/>
+          <p:cNvSpPr/>
+          <p:nvPr/>
+        </p:nvSpPr>
+        <p:spPr>
+          <a:xfrm>
+            <a:off x="640080" y="1188720"/>
+            <a:ext cx="109728" cy="2194560"/>
+          </a:xfrm>
+          <a:prstGeom prst="rect">
+            <a:avLst/>
+          </a:prstGeom>
+          <a:solidFill>
+            <a:srgbClr val="F59E0B"/>
+          </a:solidFill>
+          <a:ln w="12700">
+            <a:solidFill>
+              <a:srgbClr val="F59E0B"/>
+            </a:solidFill>
+            <a:prstDash val="solid"/>
+          </a:ln>
+        </p:spPr>
+      </p:sp>
+      <p:sp>
+        <p:nvSpPr>
+          <p:cNvPr id="3" name="Text 1"/>
+          <p:cNvSpPr txBox="1"/>
+          <p:nvPr/>
+        </p:nvSpPr>
+        <p:spPr>
+          <a:xfrm>
+            <a:off x="1005840" y="1097280"/>
+            <a:ext cx="7498080" cy="2377440"/>
+          </a:xfrm>
+          <a:prstGeom prst="rect">
+            <a:avLst/>
+          </a:prstGeom>
+          <a:noFill/>
+          <a:ln/>
+        </p:spPr>
+        <p:txBody>
+          <a:bodyPr wrap="square" lIns="0" tIns="0" rIns="0" bIns="0" rtlCol="0" anchor="ctr">
+            <a:normAutofit/>
+          </a:bodyPr>
+          <a:lstStyle/>
+          <a:p>
+            <a:pPr indent="0" marL="0">
+              <a:buNone/>
+            </a:pPr>
+            <a:r>
+              <a:rPr lang="en-US" sz="3400" b="1" dirty="0">
+                <a:solidFill>
+                  <a:srgbClr val="FFFFFF"/>
+                </a:solidFill>
+              </a:rPr>
+              <a:t>“Uma reta separa o simples; o resto pede camadas.”</a:t>
+            </a:r>
+            <a:endParaRPr lang="en-US" sz="3400" dirty="0"/>
+          </a:p>
+        </p:txBody>
+      </p:sp>
+      <p:sp>
+        <p:nvSpPr>
+          <p:cNvPr id="4" name="Text 2"/>
+          <p:cNvSpPr txBox="1"/>
+          <p:nvPr/>
+        </p:nvSpPr>
+        <p:spPr>
+          <a:xfrm>
+            <a:off x="1005840" y="3931920"/>
+            <a:ext cx="7315200" cy="365760"/>
+          </a:xfrm>
+          <a:prstGeom prst="rect">
+            <a:avLst/>
+          </a:prstGeom>
+          <a:noFill/>
+          <a:ln/>
+        </p:spPr>
+        <p:txBody>
+          <a:bodyPr wrap="square" lIns="0" tIns="0" rIns="0" bIns="0" rtlCol="0" anchor="ctr"/>
+          <a:lstStyle/>
+          <a:p>
+            <a:pPr indent="0" marL="0">
+              <a:buNone/>
+            </a:pPr>
+            <a:r>
+              <a:rPr lang="en-US" sz="1400" dirty="0">
+                <a:solidFill>
+                  <a:srgbClr val="A5B4FC"/>
+                </a:solidFill>
+              </a:rPr>
+              <a:t>Backpropagation e Redes Neurais · Capítulo 3</a:t>
+            </a:r>
+            <a:endParaRPr lang="en-US" sz="1400" dirty="0"/>
           </a:p>
         </p:txBody>
       </p:sp>
@@ -2864,7 +4911,7 @@
                 <a:ea typeface="Calibri" pitchFamily="34" charset="-122"/>
                 <a:cs typeface="Calibri" pitchFamily="34" charset="-120"/>
               </a:rPr>
-              <a:t>Situação inicial: separar com uma reta</a:t>
+              <a:t>Roteiro da aula</a:t>
             </a:r>
             <a:endParaRPr lang="en-US" sz="2600" dirty="0"/>
           </a:p>
@@ -2878,8 +4925,8 @@
         </p:nvSpPr>
         <p:spPr>
           <a:xfrm>
-            <a:off x="548640" y="1188720"/>
-            <a:ext cx="8046720" cy="3383280"/>
+            <a:off x="731520" y="1188720"/>
+            <a:ext cx="7680960" cy="3291840"/>
           </a:xfrm>
           <a:prstGeom prst="rect">
             <a:avLst/>
@@ -2888,63 +4935,121 @@
           <a:ln/>
         </p:spPr>
         <p:txBody>
-          <a:bodyPr wrap="square" lIns="0" tIns="0" rIns="0" bIns="0" rtlCol="0" anchor="t">
-            <a:normAutofit/>
-          </a:bodyPr>
+          <a:bodyPr wrap="square" lIns="0" tIns="0" rIns="0" bIns="0" rtlCol="0" anchor="t"/>
           <a:lstStyle/>
           <a:p>
             <a:pPr marL="342900" indent="-342900">
               <a:spcAft>
-                <a:spcPts val="1400"/>
+                <a:spcPts val="1200"/>
               </a:spcAft>
               <a:buSzPct val="100000"/>
-              <a:buChar char="•"/>
-            </a:pPr>
-            <a:r>
-              <a:rPr lang="en-US" sz="2400" dirty="0">
+              <a:buFont typeface="+mj-lt"/>
+              <a:buAutoNum type="arabicPeriod" startAt="1"/>
+            </a:pPr>
+            <a:r>
+              <a:rPr lang="en-US" sz="2200" dirty="0">
                 <a:solidFill>
                   <a:srgbClr val="1F2937"/>
                 </a:solidFill>
               </a:rPr>
-              <a:t>Um neurônio de limiar separa duas classes com uma reta</a:t>
-            </a:r>
-            <a:endParaRPr lang="en-US" sz="2400" dirty="0"/>
+              <a:t>Situação inicial e objetivos</a:t>
+            </a:r>
+            <a:endParaRPr lang="en-US" sz="2200" dirty="0"/>
           </a:p>
           <a:p>
             <a:pPr marL="342900" indent="-342900">
               <a:spcAft>
-                <a:spcPts val="1400"/>
+                <a:spcPts val="1200"/>
               </a:spcAft>
               <a:buSzPct val="100000"/>
-              <a:buChar char="•"/>
-            </a:pPr>
-            <a:r>
-              <a:rPr lang="en-US" sz="2400" dirty="0">
+              <a:buFont typeface="+mj-lt"/>
+              <a:buAutoNum type="arabicPeriod" startAt="1"/>
+            </a:pPr>
+            <a:r>
+              <a:rPr lang="en-US" sz="2200" dirty="0">
                 <a:solidFill>
                   <a:srgbClr val="1F2937"/>
                 </a:solidFill>
               </a:rPr>
-              <a:t>Aprende corrigindo seus erros, um por um</a:t>
-            </a:r>
-            <a:endParaRPr lang="en-US" sz="2400" dirty="0"/>
+              <a:t>Analogia do dia a dia</a:t>
+            </a:r>
+            <a:endParaRPr lang="en-US" sz="2200" dirty="0"/>
           </a:p>
           <a:p>
             <a:pPr marL="342900" indent="-342900">
               <a:spcAft>
-                <a:spcPts val="1400"/>
+                <a:spcPts val="1200"/>
               </a:spcAft>
               <a:buSzPct val="100000"/>
-              <a:buChar char="•"/>
-            </a:pPr>
-            <a:r>
-              <a:rPr lang="en-US" sz="2400" dirty="0">
+              <a:buFont typeface="+mj-lt"/>
+              <a:buAutoNum type="arabicPeriod" startAt="1"/>
+            </a:pPr>
+            <a:r>
+              <a:rPr lang="en-US" sz="2200" dirty="0">
                 <a:solidFill>
                   <a:srgbClr val="1F2937"/>
                 </a:solidFill>
               </a:rPr>
-              <a:t>E se as classes não forem separáveis por uma reta?</a:t>
-            </a:r>
-            <a:endParaRPr lang="en-US" sz="2400" dirty="0"/>
+              <a:t>Conceitos, demonstrações e figuras</a:t>
+            </a:r>
+            <a:endParaRPr lang="en-US" sz="2200" dirty="0"/>
+          </a:p>
+          <a:p>
+            <a:pPr marL="342900" indent="-342900">
+              <a:spcAft>
+                <a:spcPts val="1200"/>
+              </a:spcAft>
+              <a:buSzPct val="100000"/>
+              <a:buFont typeface="+mj-lt"/>
+              <a:buAutoNum type="arabicPeriod" startAt="1"/>
+            </a:pPr>
+            <a:r>
+              <a:rPr lang="en-US" sz="2200" dirty="0">
+                <a:solidFill>
+                  <a:srgbClr val="1F2937"/>
+                </a:solidFill>
+              </a:rPr>
+              <a:t>Exemplos e resultados do livro</a:t>
+            </a:r>
+            <a:endParaRPr lang="en-US" sz="2200" dirty="0"/>
+          </a:p>
+          <a:p>
+            <a:pPr marL="342900" indent="-342900">
+              <a:spcAft>
+                <a:spcPts val="1200"/>
+              </a:spcAft>
+              <a:buSzPct val="100000"/>
+              <a:buFont typeface="+mj-lt"/>
+              <a:buAutoNum type="arabicPeriod" startAt="1"/>
+            </a:pPr>
+            <a:r>
+              <a:rPr lang="en-US" sz="2200" dirty="0">
+                <a:solidFill>
+                  <a:srgbClr val="1F2937"/>
+                </a:solidFill>
+              </a:rPr>
+              <a:t>Quiz relâmpago</a:t>
+            </a:r>
+            <a:endParaRPr lang="en-US" sz="2200" dirty="0"/>
+          </a:p>
+          <a:p>
+            <a:pPr marL="342900" indent="-342900">
+              <a:spcAft>
+                <a:spcPts val="1200"/>
+              </a:spcAft>
+              <a:buSzPct val="100000"/>
+              <a:buFont typeface="+mj-lt"/>
+              <a:buAutoNum type="arabicPeriod" startAt="1"/>
+            </a:pPr>
+            <a:r>
+              <a:rPr lang="en-US" sz="2200" dirty="0">
+                <a:solidFill>
+                  <a:srgbClr val="1F2937"/>
+                </a:solidFill>
+              </a:rPr>
+              <a:t>Atividade mão na massa e síntese</a:t>
+            </a:r>
+            <a:endParaRPr lang="en-US" sz="2200" dirty="0"/>
           </a:p>
         </p:txBody>
       </p:sp>
@@ -3053,46 +5158,22 @@
                 <a:ea typeface="Calibri" pitchFamily="34" charset="-122"/>
                 <a:cs typeface="Calibri" pitchFamily="34" charset="-120"/>
               </a:rPr>
-              <a:t>Arquitetura do perceptron</a:t>
+              <a:t>Situação inicial: separar com uma reta</a:t>
             </a:r>
             <a:endParaRPr lang="en-US" sz="2600" dirty="0"/>
           </a:p>
         </p:txBody>
       </p:sp>
-      <p:pic>
-        <p:nvPicPr>
-          <p:cNvPr id="3" name="Image 0" descr="Soma ponderada, limiar (degrau) e saída binária.">    </p:cNvPr>
-          <p:cNvPicPr>
-            <a:picLocks noChangeAspect="1"/>
-          </p:cNvPicPr>
-          <p:nvPr/>
-        </p:nvPicPr>
-        <p:blipFill>
-          <a:blip r:embed="rId1"/>
-          <a:stretch>
-            <a:fillRect/>
-          </a:stretch>
-        </p:blipFill>
-        <p:spPr>
-          <a:xfrm>
-            <a:off x="1049140" y="1005840"/>
-            <a:ext cx="7045720" cy="3154680"/>
-          </a:xfrm>
-          <a:prstGeom prst="rect">
-            <a:avLst/>
-          </a:prstGeom>
-        </p:spPr>
-      </p:pic>
-      <p:sp>
-        <p:nvSpPr>
-          <p:cNvPr id="4" name="Text 1"/>
+      <p:sp>
+        <p:nvSpPr>
+          <p:cNvPr id="3" name="Text 1"/>
           <p:cNvSpPr txBox="1"/>
           <p:nvPr/>
         </p:nvSpPr>
         <p:spPr>
           <a:xfrm>
-            <a:off x="457200" y="4251960"/>
-            <a:ext cx="8229600" cy="457200"/>
+            <a:off x="548640" y="1188720"/>
+            <a:ext cx="8046720" cy="3383280"/>
           </a:xfrm>
           <a:prstGeom prst="rect">
             <a:avLst/>
@@ -3106,18 +5187,58 @@
           </a:bodyPr>
           <a:lstStyle/>
           <a:p>
-            <a:pPr algn="ctr" indent="0" marL="0">
-              <a:buNone/>
-            </a:pPr>
-            <a:r>
-              <a:rPr lang="en-US" sz="1400" i="1" dirty="0">
-                <a:solidFill>
-                  <a:srgbClr val="4B5563"/>
-                </a:solidFill>
-              </a:rPr>
-              <a:t>Soma ponderada, limiar (degrau) e saída binária.</a:t>
-            </a:r>
-            <a:endParaRPr lang="en-US" sz="1400" dirty="0"/>
+            <a:pPr marL="342900" indent="-342900">
+              <a:spcAft>
+                <a:spcPts val="1400"/>
+              </a:spcAft>
+              <a:buSzPct val="100000"/>
+              <a:buChar char="•"/>
+            </a:pPr>
+            <a:r>
+              <a:rPr lang="en-US" sz="2400" dirty="0">
+                <a:solidFill>
+                  <a:srgbClr val="1F2937"/>
+                </a:solidFill>
+              </a:rPr>
+              <a:t>Um neurônio de limiar separa duas classes com uma reta</a:t>
+            </a:r>
+            <a:endParaRPr lang="en-US" sz="2400" dirty="0"/>
+          </a:p>
+          <a:p>
+            <a:pPr marL="342900" indent="-342900">
+              <a:spcAft>
+                <a:spcPts val="1400"/>
+              </a:spcAft>
+              <a:buSzPct val="100000"/>
+              <a:buChar char="•"/>
+            </a:pPr>
+            <a:r>
+              <a:rPr lang="en-US" sz="2400" dirty="0">
+                <a:solidFill>
+                  <a:srgbClr val="1F2937"/>
+                </a:solidFill>
+              </a:rPr>
+              <a:t>Aprende corrigindo seus erros, um por um</a:t>
+            </a:r>
+            <a:endParaRPr lang="en-US" sz="2400" dirty="0"/>
+          </a:p>
+          <a:p>
+            <a:pPr marL="342900" indent="-342900">
+              <a:spcAft>
+                <a:spcPts val="1400"/>
+              </a:spcAft>
+              <a:buSzPct val="100000"/>
+              <a:buChar char="•"/>
+            </a:pPr>
+            <a:r>
+              <a:rPr lang="en-US" sz="2400" dirty="0">
+                <a:solidFill>
+                  <a:srgbClr val="1F2937"/>
+                </a:solidFill>
+              </a:rPr>
+              <a:t>E se as classes não forem separáveis por uma reta?</a:t>
+            </a:r>
+            <a:endParaRPr lang="en-US" sz="2400" dirty="0"/>
           </a:p>
         </p:txBody>
       </p:sp>
@@ -3226,49 +5347,46 @@
                 <a:ea typeface="Calibri" pitchFamily="34" charset="-122"/>
                 <a:cs typeface="Calibri" pitchFamily="34" charset="-120"/>
               </a:rPr>
-              <a:t>A regra de aprendizagem</a:t>
+              <a:t>Arquitetura do perceptron</a:t>
             </a:r>
             <a:endParaRPr lang="en-US" sz="2600" dirty="0"/>
           </a:p>
         </p:txBody>
       </p:sp>
-      <p:sp>
-        <p:nvSpPr>
-          <p:cNvPr id="3" name="Shape 1"/>
-          <p:cNvSpPr/>
-          <p:nvPr/>
-        </p:nvSpPr>
-        <p:spPr>
-          <a:xfrm>
-            <a:off x="457200" y="1097280"/>
-            <a:ext cx="8229600" cy="868680"/>
-          </a:xfrm>
-          <a:prstGeom prst="roundRect">
-            <a:avLst>
-              <a:gd name="adj" fmla="val 8421"/>
-            </a:avLst>
-          </a:prstGeom>
-          <a:solidFill>
-            <a:srgbClr val="E0E7FF"/>
-          </a:solidFill>
-          <a:ln w="9525">
-            <a:solidFill>
-              <a:srgbClr val="C7D2FE"/>
-            </a:solidFill>
-            <a:prstDash val="solid"/>
-          </a:ln>
-        </p:spPr>
-      </p:sp>
-      <p:sp>
-        <p:nvSpPr>
-          <p:cNvPr id="4" name="Text 2"/>
+      <p:pic>
+        <p:nvPicPr>
+          <p:cNvPr id="3" name="Image 0" descr="Soma ponderada, limiar (degrau) e saída binária.">    </p:cNvPr>
+          <p:cNvPicPr>
+            <a:picLocks noChangeAspect="1"/>
+          </p:cNvPicPr>
+          <p:nvPr/>
+        </p:nvPicPr>
+        <p:blipFill>
+          <a:blip r:embed="rId1"/>
+          <a:stretch>
+            <a:fillRect/>
+          </a:stretch>
+        </p:blipFill>
+        <p:spPr>
+          <a:xfrm>
+            <a:off x="1049140" y="1005840"/>
+            <a:ext cx="7045720" cy="3154680"/>
+          </a:xfrm>
+          <a:prstGeom prst="rect">
+            <a:avLst/>
+          </a:prstGeom>
+        </p:spPr>
+      </p:pic>
+      <p:sp>
+        <p:nvSpPr>
+          <p:cNvPr id="4" name="Text 1"/>
           <p:cNvSpPr txBox="1"/>
           <p:nvPr/>
         </p:nvSpPr>
         <p:spPr>
           <a:xfrm>
-            <a:off x="594360" y="1097280"/>
-            <a:ext cx="2743200" cy="868680"/>
+            <a:off x="457200" y="4251960"/>
+            <a:ext cx="8229600" cy="457200"/>
           </a:xfrm>
           <a:prstGeom prst="rect">
             <a:avLst/>
@@ -3277,382 +5395,23 @@
           <a:ln/>
         </p:spPr>
         <p:txBody>
-          <a:bodyPr wrap="square" lIns="0" tIns="0" rIns="0" bIns="0" rtlCol="0" anchor="ctr">
+          <a:bodyPr wrap="square" lIns="0" tIns="0" rIns="0" bIns="0" rtlCol="0" anchor="t">
             <a:normAutofit/>
           </a:bodyPr>
           <a:lstStyle/>
           <a:p>
-            <a:pPr indent="0" marL="0">
+            <a:pPr algn="ctr" indent="0" marL="0">
               <a:buNone/>
             </a:pPr>
             <a:r>
-              <a:rPr lang="en-US" sz="1400" b="1" dirty="0">
-                <a:solidFill>
-                  <a:srgbClr val="312E81"/>
-                </a:solidFill>
-              </a:rPr>
-              <a:t>1. Saída</a:t>
+              <a:rPr lang="en-US" sz="1400" i="1" dirty="0">
+                <a:solidFill>
+                  <a:srgbClr val="4B5563"/>
+                </a:solidFill>
+              </a:rPr>
+              <a:t>Soma ponderada, limiar (degrau) e saída binária.</a:t>
             </a:r>
             <a:endParaRPr lang="en-US" sz="1400" dirty="0"/>
-          </a:p>
-        </p:txBody>
-      </p:sp>
-      <p:sp>
-        <p:nvSpPr>
-          <p:cNvPr id="5" name="Text 3"/>
-          <p:cNvSpPr txBox="1"/>
-          <p:nvPr/>
-        </p:nvSpPr>
-        <p:spPr>
-          <a:xfrm>
-            <a:off x="3383280" y="1097280"/>
-            <a:ext cx="5212080" cy="868680"/>
-          </a:xfrm>
-          <a:prstGeom prst="rect">
-            <a:avLst/>
-          </a:prstGeom>
-          <a:noFill/>
-          <a:ln/>
-        </p:spPr>
-        <p:txBody>
-          <a:bodyPr wrap="square" lIns="0" tIns="0" rIns="0" bIns="0" rtlCol="0" anchor="ctr">
-            <a:normAutofit/>
-          </a:bodyPr>
-          <a:lstStyle/>
-          <a:p>
-            <a:pPr indent="0" marL="0">
-              <a:buNone/>
-            </a:pPr>
-            <a:r>
-              <a:rPr lang="en-US" sz="1700" dirty="0">
-                <a:solidFill>
-                  <a:srgbClr val="1F2937"/>
-                </a:solidFill>
-                <a:latin typeface="Cambria Math" pitchFamily="34" charset="0"/>
-                <a:ea typeface="Cambria Math" pitchFamily="34" charset="-122"/>
-                <a:cs typeface="Cambria Math" pitchFamily="34" charset="-120"/>
-              </a:rPr>
-              <a:t>ŷ = degrau(wᵀx + b)</a:t>
-            </a:r>
-            <a:endParaRPr lang="en-US" sz="1700" dirty="0"/>
-          </a:p>
-        </p:txBody>
-      </p:sp>
-      <p:sp>
-        <p:nvSpPr>
-          <p:cNvPr id="6" name="Shape 4"/>
-          <p:cNvSpPr/>
-          <p:nvPr/>
-        </p:nvSpPr>
-        <p:spPr>
-          <a:xfrm>
-            <a:off x="457200" y="2039112"/>
-            <a:ext cx="8229600" cy="868680"/>
-          </a:xfrm>
-          <a:prstGeom prst="roundRect">
-            <a:avLst>
-              <a:gd name="adj" fmla="val 8421"/>
-            </a:avLst>
-          </a:prstGeom>
-          <a:solidFill>
-            <a:srgbClr val="EEF2FF"/>
-          </a:solidFill>
-          <a:ln w="9525">
-            <a:solidFill>
-              <a:srgbClr val="C7D2FE"/>
-            </a:solidFill>
-            <a:prstDash val="solid"/>
-          </a:ln>
-        </p:spPr>
-      </p:sp>
-      <p:sp>
-        <p:nvSpPr>
-          <p:cNvPr id="7" name="Text 5"/>
-          <p:cNvSpPr txBox="1"/>
-          <p:nvPr/>
-        </p:nvSpPr>
-        <p:spPr>
-          <a:xfrm>
-            <a:off x="594360" y="2039112"/>
-            <a:ext cx="2743200" cy="868680"/>
-          </a:xfrm>
-          <a:prstGeom prst="rect">
-            <a:avLst/>
-          </a:prstGeom>
-          <a:noFill/>
-          <a:ln/>
-        </p:spPr>
-        <p:txBody>
-          <a:bodyPr wrap="square" lIns="0" tIns="0" rIns="0" bIns="0" rtlCol="0" anchor="ctr">
-            <a:normAutofit/>
-          </a:bodyPr>
-          <a:lstStyle/>
-          <a:p>
-            <a:pPr indent="0" marL="0">
-              <a:buNone/>
-            </a:pPr>
-            <a:r>
-              <a:rPr lang="en-US" sz="1400" b="1" dirty="0">
-                <a:solidFill>
-                  <a:srgbClr val="312E81"/>
-                </a:solidFill>
-              </a:rPr>
-              <a:t>2. Erro</a:t>
-            </a:r>
-            <a:endParaRPr lang="en-US" sz="1400" dirty="0"/>
-          </a:p>
-        </p:txBody>
-      </p:sp>
-      <p:sp>
-        <p:nvSpPr>
-          <p:cNvPr id="8" name="Text 6"/>
-          <p:cNvSpPr txBox="1"/>
-          <p:nvPr/>
-        </p:nvSpPr>
-        <p:spPr>
-          <a:xfrm>
-            <a:off x="3383280" y="2039112"/>
-            <a:ext cx="5212080" cy="868680"/>
-          </a:xfrm>
-          <a:prstGeom prst="rect">
-            <a:avLst/>
-          </a:prstGeom>
-          <a:noFill/>
-          <a:ln/>
-        </p:spPr>
-        <p:txBody>
-          <a:bodyPr wrap="square" lIns="0" tIns="0" rIns="0" bIns="0" rtlCol="0" anchor="ctr">
-            <a:normAutofit/>
-          </a:bodyPr>
-          <a:lstStyle/>
-          <a:p>
-            <a:pPr indent="0" marL="0">
-              <a:buNone/>
-            </a:pPr>
-            <a:r>
-              <a:rPr lang="en-US" sz="1700" dirty="0">
-                <a:solidFill>
-                  <a:srgbClr val="1F2937"/>
-                </a:solidFill>
-                <a:latin typeface="Cambria Math" pitchFamily="34" charset="0"/>
-                <a:ea typeface="Cambria Math" pitchFamily="34" charset="-122"/>
-                <a:cs typeface="Cambria Math" pitchFamily="34" charset="-120"/>
-              </a:rPr>
-              <a:t>e = t − ŷ  (vale 0, +1 ou −1)</a:t>
-            </a:r>
-            <a:endParaRPr lang="en-US" sz="1700" dirty="0"/>
-          </a:p>
-        </p:txBody>
-      </p:sp>
-      <p:sp>
-        <p:nvSpPr>
-          <p:cNvPr id="9" name="Shape 7"/>
-          <p:cNvSpPr/>
-          <p:nvPr/>
-        </p:nvSpPr>
-        <p:spPr>
-          <a:xfrm>
-            <a:off x="457200" y="2980944"/>
-            <a:ext cx="8229600" cy="868680"/>
-          </a:xfrm>
-          <a:prstGeom prst="roundRect">
-            <a:avLst>
-              <a:gd name="adj" fmla="val 8421"/>
-            </a:avLst>
-          </a:prstGeom>
-          <a:solidFill>
-            <a:srgbClr val="E0E7FF"/>
-          </a:solidFill>
-          <a:ln w="9525">
-            <a:solidFill>
-              <a:srgbClr val="C7D2FE"/>
-            </a:solidFill>
-            <a:prstDash val="solid"/>
-          </a:ln>
-        </p:spPr>
-      </p:sp>
-      <p:sp>
-        <p:nvSpPr>
-          <p:cNvPr id="10" name="Text 8"/>
-          <p:cNvSpPr txBox="1"/>
-          <p:nvPr/>
-        </p:nvSpPr>
-        <p:spPr>
-          <a:xfrm>
-            <a:off x="594360" y="2980944"/>
-            <a:ext cx="2743200" cy="868680"/>
-          </a:xfrm>
-          <a:prstGeom prst="rect">
-            <a:avLst/>
-          </a:prstGeom>
-          <a:noFill/>
-          <a:ln/>
-        </p:spPr>
-        <p:txBody>
-          <a:bodyPr wrap="square" lIns="0" tIns="0" rIns="0" bIns="0" rtlCol="0" anchor="ctr">
-            <a:normAutofit/>
-          </a:bodyPr>
-          <a:lstStyle/>
-          <a:p>
-            <a:pPr indent="0" marL="0">
-              <a:buNone/>
-            </a:pPr>
-            <a:r>
-              <a:rPr lang="en-US" sz="1400" b="1" dirty="0">
-                <a:solidFill>
-                  <a:srgbClr val="312E81"/>
-                </a:solidFill>
-              </a:rPr>
-              <a:t>3. Atualização</a:t>
-            </a:r>
-            <a:endParaRPr lang="en-US" sz="1400" dirty="0"/>
-          </a:p>
-        </p:txBody>
-      </p:sp>
-      <p:sp>
-        <p:nvSpPr>
-          <p:cNvPr id="11" name="Text 9"/>
-          <p:cNvSpPr txBox="1"/>
-          <p:nvPr/>
-        </p:nvSpPr>
-        <p:spPr>
-          <a:xfrm>
-            <a:off x="3383280" y="2980944"/>
-            <a:ext cx="5212080" cy="868680"/>
-          </a:xfrm>
-          <a:prstGeom prst="rect">
-            <a:avLst/>
-          </a:prstGeom>
-          <a:noFill/>
-          <a:ln/>
-        </p:spPr>
-        <p:txBody>
-          <a:bodyPr wrap="square" lIns="0" tIns="0" rIns="0" bIns="0" rtlCol="0" anchor="ctr">
-            <a:normAutofit/>
-          </a:bodyPr>
-          <a:lstStyle/>
-          <a:p>
-            <a:pPr indent="0" marL="0">
-              <a:buNone/>
-            </a:pPr>
-            <a:r>
-              <a:rPr lang="en-US" sz="1700" dirty="0">
-                <a:solidFill>
-                  <a:srgbClr val="1F2937"/>
-                </a:solidFill>
-                <a:latin typeface="Cambria Math" pitchFamily="34" charset="0"/>
-                <a:ea typeface="Cambria Math" pitchFamily="34" charset="-122"/>
-                <a:cs typeface="Cambria Math" pitchFamily="34" charset="-120"/>
-              </a:rPr>
-              <a:t>w ← w + η · e · x</a:t>
-            </a:r>
-            <a:endParaRPr lang="en-US" sz="1700" dirty="0"/>
-          </a:p>
-        </p:txBody>
-      </p:sp>
-      <p:sp>
-        <p:nvSpPr>
-          <p:cNvPr id="12" name="Shape 10"/>
-          <p:cNvSpPr/>
-          <p:nvPr/>
-        </p:nvSpPr>
-        <p:spPr>
-          <a:xfrm>
-            <a:off x="457200" y="3922776"/>
-            <a:ext cx="8229600" cy="868680"/>
-          </a:xfrm>
-          <a:prstGeom prst="roundRect">
-            <a:avLst>
-              <a:gd name="adj" fmla="val 8421"/>
-            </a:avLst>
-          </a:prstGeom>
-          <a:solidFill>
-            <a:srgbClr val="EEF2FF"/>
-          </a:solidFill>
-          <a:ln w="9525">
-            <a:solidFill>
-              <a:srgbClr val="C7D2FE"/>
-            </a:solidFill>
-            <a:prstDash val="solid"/>
-          </a:ln>
-        </p:spPr>
-      </p:sp>
-      <p:sp>
-        <p:nvSpPr>
-          <p:cNvPr id="13" name="Text 11"/>
-          <p:cNvSpPr txBox="1"/>
-          <p:nvPr/>
-        </p:nvSpPr>
-        <p:spPr>
-          <a:xfrm>
-            <a:off x="594360" y="3922776"/>
-            <a:ext cx="2743200" cy="868680"/>
-          </a:xfrm>
-          <a:prstGeom prst="rect">
-            <a:avLst/>
-          </a:prstGeom>
-          <a:noFill/>
-          <a:ln/>
-        </p:spPr>
-        <p:txBody>
-          <a:bodyPr wrap="square" lIns="0" tIns="0" rIns="0" bIns="0" rtlCol="0" anchor="ctr">
-            <a:normAutofit/>
-          </a:bodyPr>
-          <a:lstStyle/>
-          <a:p>
-            <a:pPr indent="0" marL="0">
-              <a:buNone/>
-            </a:pPr>
-            <a:r>
-              <a:rPr lang="en-US" sz="1400" b="1" dirty="0">
-                <a:solidFill>
-                  <a:srgbClr val="312E81"/>
-                </a:solidFill>
-              </a:rPr>
-              <a:t>4. Viés</a:t>
-            </a:r>
-            <a:endParaRPr lang="en-US" sz="1400" dirty="0"/>
-          </a:p>
-        </p:txBody>
-      </p:sp>
-      <p:sp>
-        <p:nvSpPr>
-          <p:cNvPr id="14" name="Text 12"/>
-          <p:cNvSpPr txBox="1"/>
-          <p:nvPr/>
-        </p:nvSpPr>
-        <p:spPr>
-          <a:xfrm>
-            <a:off x="3383280" y="3922776"/>
-            <a:ext cx="5212080" cy="868680"/>
-          </a:xfrm>
-          <a:prstGeom prst="rect">
-            <a:avLst/>
-          </a:prstGeom>
-          <a:noFill/>
-          <a:ln/>
-        </p:spPr>
-        <p:txBody>
-          <a:bodyPr wrap="square" lIns="0" tIns="0" rIns="0" bIns="0" rtlCol="0" anchor="ctr">
-            <a:normAutofit/>
-          </a:bodyPr>
-          <a:lstStyle/>
-          <a:p>
-            <a:pPr indent="0" marL="0">
-              <a:buNone/>
-            </a:pPr>
-            <a:r>
-              <a:rPr lang="en-US" sz="1700" dirty="0">
-                <a:solidFill>
-                  <a:srgbClr val="1F2937"/>
-                </a:solidFill>
-                <a:latin typeface="Cambria Math" pitchFamily="34" charset="0"/>
-                <a:ea typeface="Cambria Math" pitchFamily="34" charset="-122"/>
-                <a:cs typeface="Cambria Math" pitchFamily="34" charset="-120"/>
-              </a:rPr>
-              <a:t>b ← b + η · e</a:t>
-            </a:r>
-            <a:endParaRPr lang="en-US" sz="1700" dirty="0"/>
           </a:p>
         </p:txBody>
       </p:sp>
@@ -3761,46 +5520,85 @@
                 <a:ea typeface="Calibri" pitchFamily="34" charset="-122"/>
                 <a:cs typeface="Calibri" pitchFamily="34" charset="-120"/>
               </a:rPr>
-              <a:t>Aprendendo a porta AND</a:t>
+              <a:t>Analogia: o porteiro que aprende</a:t>
             </a:r>
             <a:endParaRPr lang="en-US" sz="2600" dirty="0"/>
           </a:p>
         </p:txBody>
       </p:sp>
-      <p:pic>
-        <p:nvPicPr>
-          <p:cNvPr id="3" name="Image 0" descr="A reta se move a cada correção até separar as classes.">    </p:cNvPr>
-          <p:cNvPicPr>
-            <a:picLocks noChangeAspect="1"/>
-          </p:cNvPicPr>
-          <p:nvPr/>
-        </p:nvPicPr>
-        <p:blipFill>
-          <a:blip r:embed="rId1"/>
-          <a:stretch>
-            <a:fillRect/>
-          </a:stretch>
-        </p:blipFill>
-        <p:spPr>
-          <a:xfrm>
-            <a:off x="2764710" y="1005840"/>
-            <a:ext cx="3614579" cy="3154680"/>
-          </a:xfrm>
-          <a:prstGeom prst="rect">
-            <a:avLst/>
-          </a:prstGeom>
-        </p:spPr>
-      </p:pic>
-      <p:sp>
-        <p:nvSpPr>
-          <p:cNvPr id="4" name="Text 1"/>
+      <p:sp>
+        <p:nvSpPr>
+          <p:cNvPr id="3" name="Shape 1"/>
+          <p:cNvSpPr/>
+          <p:nvPr/>
+        </p:nvSpPr>
+        <p:spPr>
+          <a:xfrm>
+            <a:off x="548640" y="1188720"/>
+            <a:ext cx="8046720" cy="3108960"/>
+          </a:xfrm>
+          <a:prstGeom prst="roundRect">
+            <a:avLst>
+              <a:gd name="adj" fmla="val 3529"/>
+            </a:avLst>
+          </a:prstGeom>
+          <a:solidFill>
+            <a:srgbClr val="ECFEFF"/>
+          </a:solidFill>
+          <a:ln w="25400">
+            <a:solidFill>
+              <a:srgbClr val="06B6D4"/>
+            </a:solidFill>
+            <a:prstDash val="solid"/>
+          </a:ln>
+        </p:spPr>
+      </p:sp>
+      <p:sp>
+        <p:nvSpPr>
+          <p:cNvPr id="4" name="Text 2"/>
           <p:cNvSpPr txBox="1"/>
           <p:nvPr/>
         </p:nvSpPr>
         <p:spPr>
           <a:xfrm>
-            <a:off x="457200" y="4251960"/>
-            <a:ext cx="8229600" cy="457200"/>
+            <a:off x="822960" y="1325880"/>
+            <a:ext cx="3657600" cy="365760"/>
+          </a:xfrm>
+          <a:prstGeom prst="rect">
+            <a:avLst/>
+          </a:prstGeom>
+          <a:noFill/>
+          <a:ln/>
+        </p:spPr>
+        <p:txBody>
+          <a:bodyPr wrap="square" lIns="0" tIns="0" rIns="0" bIns="0" rtlCol="0" anchor="ctr"/>
+          <a:lstStyle/>
+          <a:p>
+            <a:pPr indent="0" marL="0">
+              <a:buNone/>
+            </a:pPr>
+            <a:r>
+              <a:rPr lang="en-US" sz="1400" b="1" spc="300" kern="0" dirty="0">
+                <a:solidFill>
+                  <a:srgbClr val="0E7490"/>
+                </a:solidFill>
+              </a:rPr>
+              <a:t>NO SEU DIA A DIA</a:t>
+            </a:r>
+            <a:endParaRPr lang="en-US" sz="1400" dirty="0"/>
+          </a:p>
+        </p:txBody>
+      </p:sp>
+      <p:sp>
+        <p:nvSpPr>
+          <p:cNvPr id="5" name="Text 3"/>
+          <p:cNvSpPr txBox="1"/>
+          <p:nvPr/>
+        </p:nvSpPr>
+        <p:spPr>
+          <a:xfrm>
+            <a:off x="822960" y="1783080"/>
+            <a:ext cx="7498080" cy="2377440"/>
           </a:xfrm>
           <a:prstGeom prst="rect">
             <a:avLst/>
@@ -3814,18 +5612,18 @@
           </a:bodyPr>
           <a:lstStyle/>
           <a:p>
-            <a:pPr algn="ctr" indent="0" marL="0">
+            <a:pPr indent="0" marL="0">
               <a:buNone/>
             </a:pPr>
             <a:r>
-              <a:rPr lang="en-US" sz="1400" i="1" dirty="0">
-                <a:solidFill>
-                  <a:srgbClr val="4B5563"/>
-                </a:solidFill>
-              </a:rPr>
-              <a:t>A reta se move a cada correção até separar as classes.</a:t>
-            </a:r>
-            <a:endParaRPr lang="en-US" sz="1400" dirty="0"/>
+              <a:rPr lang="en-US" sz="2100" dirty="0">
+                <a:solidFill>
+                  <a:srgbClr val="1F2937"/>
+                </a:solidFill>
+              </a:rPr>
+              <a:t>O perceptron é um porteiro com uma regra simples: soma os sinais do convidado e decide entrar ou não. Cada vez que erra, ele ajusta o critério na direção do erro. Se existir uma fronteira reta entre quem entra e quem não entra, ele acaba acertando sempre.</a:t>
+            </a:r>
+            <a:endParaRPr lang="en-US" sz="2100" dirty="0"/>
           </a:p>
         </p:txBody>
       </p:sp>
@@ -3934,46 +5732,49 @@
                 <a:ea typeface="Calibri" pitchFamily="34" charset="-122"/>
                 <a:cs typeface="Calibri" pitchFamily="34" charset="-120"/>
               </a:rPr>
-              <a:t>Portas lógicas</a:t>
+              <a:t>A regra de aprendizagem</a:t>
             </a:r>
             <a:endParaRPr lang="en-US" sz="2600" dirty="0"/>
           </a:p>
         </p:txBody>
       </p:sp>
-      <p:pic>
-        <p:nvPicPr>
-          <p:cNvPr id="3" name="Image 0" descr="AND e OR são linearmente separáveis; o XOR não.">    </p:cNvPr>
-          <p:cNvPicPr>
-            <a:picLocks noChangeAspect="1"/>
-          </p:cNvPicPr>
-          <p:nvPr/>
-        </p:nvPicPr>
-        <p:blipFill>
-          <a:blip r:embed="rId1"/>
-          <a:stretch>
-            <a:fillRect/>
-          </a:stretch>
-        </p:blipFill>
-        <p:spPr>
-          <a:xfrm>
-            <a:off x="457200" y="1005840"/>
-            <a:ext cx="8229600" cy="2572537"/>
-          </a:xfrm>
-          <a:prstGeom prst="rect">
-            <a:avLst/>
-          </a:prstGeom>
-        </p:spPr>
-      </p:pic>
-      <p:sp>
-        <p:nvSpPr>
-          <p:cNvPr id="4" name="Text 1"/>
+      <p:sp>
+        <p:nvSpPr>
+          <p:cNvPr id="3" name="Shape 1"/>
+          <p:cNvSpPr/>
+          <p:nvPr/>
+        </p:nvSpPr>
+        <p:spPr>
+          <a:xfrm>
+            <a:off x="457200" y="1097280"/>
+            <a:ext cx="8229600" cy="868680"/>
+          </a:xfrm>
+          <a:prstGeom prst="roundRect">
+            <a:avLst>
+              <a:gd name="adj" fmla="val 8421"/>
+            </a:avLst>
+          </a:prstGeom>
+          <a:solidFill>
+            <a:srgbClr val="E0E7FF"/>
+          </a:solidFill>
+          <a:ln w="9525">
+            <a:solidFill>
+              <a:srgbClr val="C7D2FE"/>
+            </a:solidFill>
+            <a:prstDash val="solid"/>
+          </a:ln>
+        </p:spPr>
+      </p:sp>
+      <p:sp>
+        <p:nvSpPr>
+          <p:cNvPr id="4" name="Text 2"/>
           <p:cNvSpPr txBox="1"/>
           <p:nvPr/>
         </p:nvSpPr>
         <p:spPr>
           <a:xfrm>
-            <a:off x="457200" y="3669817"/>
-            <a:ext cx="8229600" cy="457200"/>
+            <a:off x="594360" y="1097280"/>
+            <a:ext cx="2743200" cy="868680"/>
           </a:xfrm>
           <a:prstGeom prst="rect">
             <a:avLst/>
@@ -3982,23 +5783,382 @@
           <a:ln/>
         </p:spPr>
         <p:txBody>
-          <a:bodyPr wrap="square" lIns="0" tIns="0" rIns="0" bIns="0" rtlCol="0" anchor="t">
+          <a:bodyPr wrap="square" lIns="0" tIns="0" rIns="0" bIns="0" rtlCol="0" anchor="ctr">
             <a:normAutofit/>
           </a:bodyPr>
           <a:lstStyle/>
           <a:p>
-            <a:pPr algn="ctr" indent="0" marL="0">
+            <a:pPr indent="0" marL="0">
               <a:buNone/>
             </a:pPr>
             <a:r>
-              <a:rPr lang="en-US" sz="1400" i="1" dirty="0">
-                <a:solidFill>
-                  <a:srgbClr val="4B5563"/>
-                </a:solidFill>
-              </a:rPr>
-              <a:t>AND e OR são linearmente separáveis; o XOR não.</a:t>
+              <a:rPr lang="en-US" sz="1400" b="1" dirty="0">
+                <a:solidFill>
+                  <a:srgbClr val="312E81"/>
+                </a:solidFill>
+              </a:rPr>
+              <a:t>1. Saída</a:t>
             </a:r>
             <a:endParaRPr lang="en-US" sz="1400" dirty="0"/>
+          </a:p>
+        </p:txBody>
+      </p:sp>
+      <p:sp>
+        <p:nvSpPr>
+          <p:cNvPr id="5" name="Text 3"/>
+          <p:cNvSpPr txBox="1"/>
+          <p:nvPr/>
+        </p:nvSpPr>
+        <p:spPr>
+          <a:xfrm>
+            <a:off x="3383280" y="1097280"/>
+            <a:ext cx="5212080" cy="868680"/>
+          </a:xfrm>
+          <a:prstGeom prst="rect">
+            <a:avLst/>
+          </a:prstGeom>
+          <a:noFill/>
+          <a:ln/>
+        </p:spPr>
+        <p:txBody>
+          <a:bodyPr wrap="square" lIns="0" tIns="0" rIns="0" bIns="0" rtlCol="0" anchor="ctr">
+            <a:normAutofit/>
+          </a:bodyPr>
+          <a:lstStyle/>
+          <a:p>
+            <a:pPr indent="0" marL="0">
+              <a:buNone/>
+            </a:pPr>
+            <a:r>
+              <a:rPr lang="en-US" sz="1700" dirty="0">
+                <a:solidFill>
+                  <a:srgbClr val="1F2937"/>
+                </a:solidFill>
+                <a:latin typeface="Cambria Math" pitchFamily="34" charset="0"/>
+                <a:ea typeface="Cambria Math" pitchFamily="34" charset="-122"/>
+                <a:cs typeface="Cambria Math" pitchFamily="34" charset="-120"/>
+              </a:rPr>
+              <a:t>ŷ = degrau(wᵀx + b)</a:t>
+            </a:r>
+            <a:endParaRPr lang="en-US" sz="1700" dirty="0"/>
+          </a:p>
+        </p:txBody>
+      </p:sp>
+      <p:sp>
+        <p:nvSpPr>
+          <p:cNvPr id="6" name="Shape 4"/>
+          <p:cNvSpPr/>
+          <p:nvPr/>
+        </p:nvSpPr>
+        <p:spPr>
+          <a:xfrm>
+            <a:off x="457200" y="2039112"/>
+            <a:ext cx="8229600" cy="868680"/>
+          </a:xfrm>
+          <a:prstGeom prst="roundRect">
+            <a:avLst>
+              <a:gd name="adj" fmla="val 8421"/>
+            </a:avLst>
+          </a:prstGeom>
+          <a:solidFill>
+            <a:srgbClr val="EEF2FF"/>
+          </a:solidFill>
+          <a:ln w="9525">
+            <a:solidFill>
+              <a:srgbClr val="C7D2FE"/>
+            </a:solidFill>
+            <a:prstDash val="solid"/>
+          </a:ln>
+        </p:spPr>
+      </p:sp>
+      <p:sp>
+        <p:nvSpPr>
+          <p:cNvPr id="7" name="Text 5"/>
+          <p:cNvSpPr txBox="1"/>
+          <p:nvPr/>
+        </p:nvSpPr>
+        <p:spPr>
+          <a:xfrm>
+            <a:off x="594360" y="2039112"/>
+            <a:ext cx="2743200" cy="868680"/>
+          </a:xfrm>
+          <a:prstGeom prst="rect">
+            <a:avLst/>
+          </a:prstGeom>
+          <a:noFill/>
+          <a:ln/>
+        </p:spPr>
+        <p:txBody>
+          <a:bodyPr wrap="square" lIns="0" tIns="0" rIns="0" bIns="0" rtlCol="0" anchor="ctr">
+            <a:normAutofit/>
+          </a:bodyPr>
+          <a:lstStyle/>
+          <a:p>
+            <a:pPr indent="0" marL="0">
+              <a:buNone/>
+            </a:pPr>
+            <a:r>
+              <a:rPr lang="en-US" sz="1400" b="1" dirty="0">
+                <a:solidFill>
+                  <a:srgbClr val="312E81"/>
+                </a:solidFill>
+              </a:rPr>
+              <a:t>2. Erro</a:t>
+            </a:r>
+            <a:endParaRPr lang="en-US" sz="1400" dirty="0"/>
+          </a:p>
+        </p:txBody>
+      </p:sp>
+      <p:sp>
+        <p:nvSpPr>
+          <p:cNvPr id="8" name="Text 6"/>
+          <p:cNvSpPr txBox="1"/>
+          <p:nvPr/>
+        </p:nvSpPr>
+        <p:spPr>
+          <a:xfrm>
+            <a:off x="3383280" y="2039112"/>
+            <a:ext cx="5212080" cy="868680"/>
+          </a:xfrm>
+          <a:prstGeom prst="rect">
+            <a:avLst/>
+          </a:prstGeom>
+          <a:noFill/>
+          <a:ln/>
+        </p:spPr>
+        <p:txBody>
+          <a:bodyPr wrap="square" lIns="0" tIns="0" rIns="0" bIns="0" rtlCol="0" anchor="ctr">
+            <a:normAutofit/>
+          </a:bodyPr>
+          <a:lstStyle/>
+          <a:p>
+            <a:pPr indent="0" marL="0">
+              <a:buNone/>
+            </a:pPr>
+            <a:r>
+              <a:rPr lang="en-US" sz="1700" dirty="0">
+                <a:solidFill>
+                  <a:srgbClr val="1F2937"/>
+                </a:solidFill>
+                <a:latin typeface="Cambria Math" pitchFamily="34" charset="0"/>
+                <a:ea typeface="Cambria Math" pitchFamily="34" charset="-122"/>
+                <a:cs typeface="Cambria Math" pitchFamily="34" charset="-120"/>
+              </a:rPr>
+              <a:t>e = t − ŷ  (vale 0, +1 ou −1)</a:t>
+            </a:r>
+            <a:endParaRPr lang="en-US" sz="1700" dirty="0"/>
+          </a:p>
+        </p:txBody>
+      </p:sp>
+      <p:sp>
+        <p:nvSpPr>
+          <p:cNvPr id="9" name="Shape 7"/>
+          <p:cNvSpPr/>
+          <p:nvPr/>
+        </p:nvSpPr>
+        <p:spPr>
+          <a:xfrm>
+            <a:off x="457200" y="2980944"/>
+            <a:ext cx="8229600" cy="868680"/>
+          </a:xfrm>
+          <a:prstGeom prst="roundRect">
+            <a:avLst>
+              <a:gd name="adj" fmla="val 8421"/>
+            </a:avLst>
+          </a:prstGeom>
+          <a:solidFill>
+            <a:srgbClr val="E0E7FF"/>
+          </a:solidFill>
+          <a:ln w="9525">
+            <a:solidFill>
+              <a:srgbClr val="C7D2FE"/>
+            </a:solidFill>
+            <a:prstDash val="solid"/>
+          </a:ln>
+        </p:spPr>
+      </p:sp>
+      <p:sp>
+        <p:nvSpPr>
+          <p:cNvPr id="10" name="Text 8"/>
+          <p:cNvSpPr txBox="1"/>
+          <p:nvPr/>
+        </p:nvSpPr>
+        <p:spPr>
+          <a:xfrm>
+            <a:off x="594360" y="2980944"/>
+            <a:ext cx="2743200" cy="868680"/>
+          </a:xfrm>
+          <a:prstGeom prst="rect">
+            <a:avLst/>
+          </a:prstGeom>
+          <a:noFill/>
+          <a:ln/>
+        </p:spPr>
+        <p:txBody>
+          <a:bodyPr wrap="square" lIns="0" tIns="0" rIns="0" bIns="0" rtlCol="0" anchor="ctr">
+            <a:normAutofit/>
+          </a:bodyPr>
+          <a:lstStyle/>
+          <a:p>
+            <a:pPr indent="0" marL="0">
+              <a:buNone/>
+            </a:pPr>
+            <a:r>
+              <a:rPr lang="en-US" sz="1400" b="1" dirty="0">
+                <a:solidFill>
+                  <a:srgbClr val="312E81"/>
+                </a:solidFill>
+              </a:rPr>
+              <a:t>3. Atualização</a:t>
+            </a:r>
+            <a:endParaRPr lang="en-US" sz="1400" dirty="0"/>
+          </a:p>
+        </p:txBody>
+      </p:sp>
+      <p:sp>
+        <p:nvSpPr>
+          <p:cNvPr id="11" name="Text 9"/>
+          <p:cNvSpPr txBox="1"/>
+          <p:nvPr/>
+        </p:nvSpPr>
+        <p:spPr>
+          <a:xfrm>
+            <a:off x="3383280" y="2980944"/>
+            <a:ext cx="5212080" cy="868680"/>
+          </a:xfrm>
+          <a:prstGeom prst="rect">
+            <a:avLst/>
+          </a:prstGeom>
+          <a:noFill/>
+          <a:ln/>
+        </p:spPr>
+        <p:txBody>
+          <a:bodyPr wrap="square" lIns="0" tIns="0" rIns="0" bIns="0" rtlCol="0" anchor="ctr">
+            <a:normAutofit/>
+          </a:bodyPr>
+          <a:lstStyle/>
+          <a:p>
+            <a:pPr indent="0" marL="0">
+              <a:buNone/>
+            </a:pPr>
+            <a:r>
+              <a:rPr lang="en-US" sz="1700" dirty="0">
+                <a:solidFill>
+                  <a:srgbClr val="1F2937"/>
+                </a:solidFill>
+                <a:latin typeface="Cambria Math" pitchFamily="34" charset="0"/>
+                <a:ea typeface="Cambria Math" pitchFamily="34" charset="-122"/>
+                <a:cs typeface="Cambria Math" pitchFamily="34" charset="-120"/>
+              </a:rPr>
+              <a:t>w ← w + η · e · x</a:t>
+            </a:r>
+            <a:endParaRPr lang="en-US" sz="1700" dirty="0"/>
+          </a:p>
+        </p:txBody>
+      </p:sp>
+      <p:sp>
+        <p:nvSpPr>
+          <p:cNvPr id="12" name="Shape 10"/>
+          <p:cNvSpPr/>
+          <p:nvPr/>
+        </p:nvSpPr>
+        <p:spPr>
+          <a:xfrm>
+            <a:off x="457200" y="3922776"/>
+            <a:ext cx="8229600" cy="868680"/>
+          </a:xfrm>
+          <a:prstGeom prst="roundRect">
+            <a:avLst>
+              <a:gd name="adj" fmla="val 8421"/>
+            </a:avLst>
+          </a:prstGeom>
+          <a:solidFill>
+            <a:srgbClr val="EEF2FF"/>
+          </a:solidFill>
+          <a:ln w="9525">
+            <a:solidFill>
+              <a:srgbClr val="C7D2FE"/>
+            </a:solidFill>
+            <a:prstDash val="solid"/>
+          </a:ln>
+        </p:spPr>
+      </p:sp>
+      <p:sp>
+        <p:nvSpPr>
+          <p:cNvPr id="13" name="Text 11"/>
+          <p:cNvSpPr txBox="1"/>
+          <p:nvPr/>
+        </p:nvSpPr>
+        <p:spPr>
+          <a:xfrm>
+            <a:off x="594360" y="3922776"/>
+            <a:ext cx="2743200" cy="868680"/>
+          </a:xfrm>
+          <a:prstGeom prst="rect">
+            <a:avLst/>
+          </a:prstGeom>
+          <a:noFill/>
+          <a:ln/>
+        </p:spPr>
+        <p:txBody>
+          <a:bodyPr wrap="square" lIns="0" tIns="0" rIns="0" bIns="0" rtlCol="0" anchor="ctr">
+            <a:normAutofit/>
+          </a:bodyPr>
+          <a:lstStyle/>
+          <a:p>
+            <a:pPr indent="0" marL="0">
+              <a:buNone/>
+            </a:pPr>
+            <a:r>
+              <a:rPr lang="en-US" sz="1400" b="1" dirty="0">
+                <a:solidFill>
+                  <a:srgbClr val="312E81"/>
+                </a:solidFill>
+              </a:rPr>
+              <a:t>4. Viés</a:t>
+            </a:r>
+            <a:endParaRPr lang="en-US" sz="1400" dirty="0"/>
+          </a:p>
+        </p:txBody>
+      </p:sp>
+      <p:sp>
+        <p:nvSpPr>
+          <p:cNvPr id="14" name="Text 12"/>
+          <p:cNvSpPr txBox="1"/>
+          <p:nvPr/>
+        </p:nvSpPr>
+        <p:spPr>
+          <a:xfrm>
+            <a:off x="3383280" y="3922776"/>
+            <a:ext cx="5212080" cy="868680"/>
+          </a:xfrm>
+          <a:prstGeom prst="rect">
+            <a:avLst/>
+          </a:prstGeom>
+          <a:noFill/>
+          <a:ln/>
+        </p:spPr>
+        <p:txBody>
+          <a:bodyPr wrap="square" lIns="0" tIns="0" rIns="0" bIns="0" rtlCol="0" anchor="ctr">
+            <a:normAutofit/>
+          </a:bodyPr>
+          <a:lstStyle/>
+          <a:p>
+            <a:pPr indent="0" marL="0">
+              <a:buNone/>
+            </a:pPr>
+            <a:r>
+              <a:rPr lang="en-US" sz="1700" dirty="0">
+                <a:solidFill>
+                  <a:srgbClr val="1F2937"/>
+                </a:solidFill>
+                <a:latin typeface="Cambria Math" pitchFamily="34" charset="0"/>
+                <a:ea typeface="Cambria Math" pitchFamily="34" charset="-122"/>
+                <a:cs typeface="Cambria Math" pitchFamily="34" charset="-120"/>
+              </a:rPr>
+              <a:t>b ← b + η · e</a:t>
+            </a:r>
+            <a:endParaRPr lang="en-US" sz="1700" dirty="0"/>
           </a:p>
         </p:txBody>
       </p:sp>
@@ -4107,22 +6267,46 @@
                 <a:ea typeface="Calibri" pitchFamily="34" charset="-122"/>
                 <a:cs typeface="Calibri" pitchFamily="34" charset="-120"/>
               </a:rPr>
-              <a:t>Teorema de convergência</a:t>
+              <a:t>Aprendendo a porta AND</a:t>
             </a:r>
             <a:endParaRPr lang="en-US" sz="2600" dirty="0"/>
           </a:p>
         </p:txBody>
       </p:sp>
-      <p:sp>
-        <p:nvSpPr>
-          <p:cNvPr id="3" name="Text 1"/>
+      <p:pic>
+        <p:nvPicPr>
+          <p:cNvPr id="3" name="Image 0" descr="A reta se move a cada correção até separar as classes.">    </p:cNvPr>
+          <p:cNvPicPr>
+            <a:picLocks noChangeAspect="1"/>
+          </p:cNvPicPr>
+          <p:nvPr/>
+        </p:nvPicPr>
+        <p:blipFill>
+          <a:blip r:embed="rId1"/>
+          <a:stretch>
+            <a:fillRect/>
+          </a:stretch>
+        </p:blipFill>
+        <p:spPr>
+          <a:xfrm>
+            <a:off x="2764710" y="1005840"/>
+            <a:ext cx="3614579" cy="3154680"/>
+          </a:xfrm>
+          <a:prstGeom prst="rect">
+            <a:avLst/>
+          </a:prstGeom>
+        </p:spPr>
+      </p:pic>
+      <p:sp>
+        <p:nvSpPr>
+          <p:cNvPr id="4" name="Text 1"/>
           <p:cNvSpPr txBox="1"/>
           <p:nvPr/>
         </p:nvSpPr>
         <p:spPr>
           <a:xfrm>
-            <a:off x="548640" y="1188720"/>
-            <a:ext cx="8046720" cy="3383280"/>
+            <a:off x="457200" y="4251960"/>
+            <a:ext cx="8229600" cy="457200"/>
           </a:xfrm>
           <a:prstGeom prst="rect">
             <a:avLst/>
@@ -4136,76 +6320,18 @@
           </a:bodyPr>
           <a:lstStyle/>
           <a:p>
-            <a:pPr marL="342900" indent="-342900">
-              <a:spcAft>
-                <a:spcPts val="1400"/>
-              </a:spcAft>
-              <a:buSzPct val="100000"/>
-              <a:buChar char="•"/>
-            </a:pPr>
-            <a:r>
-              <a:rPr lang="en-US" sz="2400" dirty="0">
-                <a:solidFill>
-                  <a:srgbClr val="1F2937"/>
-                </a:solidFill>
-              </a:rPr>
-              <a:t>Se os dados são linearmente separáveis, o perceptron converge em número finito de correções</a:t>
-            </a:r>
-            <a:endParaRPr lang="en-US" sz="2400" dirty="0"/>
-          </a:p>
-          <a:p>
-            <a:pPr marL="342900" indent="-342900">
-              <a:spcAft>
-                <a:spcPts val="1400"/>
-              </a:spcAft>
-              <a:buSzPct val="100000"/>
-              <a:buChar char="•"/>
-            </a:pPr>
-            <a:r>
-              <a:rPr lang="en-US" sz="2400" dirty="0">
-                <a:solidFill>
-                  <a:srgbClr val="1F2937"/>
-                </a:solidFill>
-              </a:rPr>
-              <a:t>O número de erros é limitado por (R/γ)²</a:t>
-            </a:r>
-            <a:endParaRPr lang="en-US" sz="2400" dirty="0"/>
-          </a:p>
-          <a:p>
-            <a:pPr marL="342900" indent="-342900">
-              <a:spcAft>
-                <a:spcPts val="1400"/>
-              </a:spcAft>
-              <a:buSzPct val="100000"/>
-              <a:buChar char="•"/>
-            </a:pPr>
-            <a:r>
-              <a:rPr lang="en-US" sz="2400" dirty="0">
-                <a:solidFill>
-                  <a:srgbClr val="1F2937"/>
-                </a:solidFill>
-              </a:rPr>
-              <a:t>R: raio dos dados; γ: margem</a:t>
-            </a:r>
-            <a:endParaRPr lang="en-US" sz="2400" dirty="0"/>
-          </a:p>
-          <a:p>
-            <a:pPr marL="342900" indent="-342900">
-              <a:spcAft>
-                <a:spcPts val="1400"/>
-              </a:spcAft>
-              <a:buSzPct val="100000"/>
-              <a:buChar char="•"/>
-            </a:pPr>
-            <a:r>
-              <a:rPr lang="en-US" sz="2400" dirty="0">
-                <a:solidFill>
-                  <a:srgbClr val="1F2937"/>
-                </a:solidFill>
-              </a:rPr>
-              <a:t>Se não há separação, o algoritmo não para sozinho</a:t>
-            </a:r>
-            <a:endParaRPr lang="en-US" sz="2400" dirty="0"/>
+            <a:pPr algn="ctr" indent="0" marL="0">
+              <a:buNone/>
+            </a:pPr>
+            <a:r>
+              <a:rPr lang="en-US" sz="1400" i="1" dirty="0">
+                <a:solidFill>
+                  <a:srgbClr val="4B5563"/>
+                </a:solidFill>
+              </a:rPr>
+              <a:t>A reta se move a cada correção até separar as classes.</a:t>
+            </a:r>
+            <a:endParaRPr lang="en-US" sz="1400" dirty="0"/>
           </a:p>
         </p:txBody>
       </p:sp>
@@ -4314,7 +6440,7 @@
                 <a:ea typeface="Calibri" pitchFamily="34" charset="-122"/>
                 <a:cs typeface="Calibri" pitchFamily="34" charset="-120"/>
               </a:rPr>
-              <a:t>Quando não há separação</a:t>
+              <a:t>Portas lógicas</a:t>
             </a:r>
             <a:endParaRPr lang="en-US" sz="2600" dirty="0"/>
           </a:p>
@@ -4322,7 +6448,7 @@
       </p:sp>
       <p:pic>
         <p:nvPicPr>
-          <p:cNvPr id="3" name="Image 0" descr="Sem reta que separe, o perceptron oscila.">    </p:cNvPr>
+          <p:cNvPr id="3" name="Image 0" descr="AND e OR são linearmente separáveis; o XOR não.">    </p:cNvPr>
           <p:cNvPicPr>
             <a:picLocks noChangeAspect="1"/>
           </p:cNvPicPr>
@@ -4336,8 +6462,8 @@
         </p:blipFill>
         <p:spPr>
           <a:xfrm>
-            <a:off x="808185" y="1005840"/>
-            <a:ext cx="7527631" cy="3154680"/>
+            <a:off x="457200" y="1005840"/>
+            <a:ext cx="8229600" cy="2572537"/>
           </a:xfrm>
           <a:prstGeom prst="rect">
             <a:avLst/>
@@ -4352,7 +6478,7 @@
         </p:nvSpPr>
         <p:spPr>
           <a:xfrm>
-            <a:off x="457200" y="4251960"/>
+            <a:off x="457200" y="3669817"/>
             <a:ext cx="8229600" cy="457200"/>
           </a:xfrm>
           <a:prstGeom prst="rect">
@@ -4376,7 +6502,7 @@
                   <a:srgbClr val="4B5563"/>
                 </a:solidFill>
               </a:rPr>
-              <a:t>Sem reta que separe, o perceptron oscila.</a:t>
+              <a:t>AND e OR são linearmente separáveis; o XOR não.</a:t>
             </a:r>
             <a:endParaRPr lang="en-US" sz="1400" dirty="0"/>
           </a:p>
@@ -4487,46 +6613,22 @@
                 <a:ea typeface="Calibri" pitchFamily="34" charset="-122"/>
                 <a:cs typeface="Calibri" pitchFamily="34" charset="-120"/>
               </a:rPr>
-              <a:t>XOR resolvido com duas camadas</a:t>
+              <a:t>Teorema de convergência</a:t>
             </a:r>
             <a:endParaRPr lang="en-US" sz="2600" dirty="0"/>
           </a:p>
         </p:txBody>
       </p:sp>
-      <p:pic>
-        <p:nvPicPr>
-          <p:cNvPr id="3" name="Image 0" descr="Uma camada oculta transforma o espaço e torna o problema separável.">    </p:cNvPr>
-          <p:cNvPicPr>
-            <a:picLocks noChangeAspect="1"/>
-          </p:cNvPicPr>
-          <p:nvPr/>
-        </p:nvPicPr>
-        <p:blipFill>
-          <a:blip r:embed="rId1"/>
-          <a:stretch>
-            <a:fillRect/>
-          </a:stretch>
-        </p:blipFill>
-        <p:spPr>
-          <a:xfrm>
-            <a:off x="457200" y="1005840"/>
-            <a:ext cx="8229600" cy="3048000"/>
-          </a:xfrm>
-          <a:prstGeom prst="rect">
-            <a:avLst/>
-          </a:prstGeom>
-        </p:spPr>
-      </p:pic>
-      <p:sp>
-        <p:nvSpPr>
-          <p:cNvPr id="4" name="Text 1"/>
+      <p:sp>
+        <p:nvSpPr>
+          <p:cNvPr id="3" name="Text 1"/>
           <p:cNvSpPr txBox="1"/>
           <p:nvPr/>
         </p:nvSpPr>
         <p:spPr>
           <a:xfrm>
-            <a:off x="457200" y="4145280"/>
-            <a:ext cx="8229600" cy="457200"/>
+            <a:off x="548640" y="1188720"/>
+            <a:ext cx="8046720" cy="3383280"/>
           </a:xfrm>
           <a:prstGeom prst="rect">
             <a:avLst/>
@@ -4540,18 +6642,76 @@
           </a:bodyPr>
           <a:lstStyle/>
           <a:p>
-            <a:pPr algn="ctr" indent="0" marL="0">
-              <a:buNone/>
-            </a:pPr>
-            <a:r>
-              <a:rPr lang="en-US" sz="1400" i="1" dirty="0">
-                <a:solidFill>
-                  <a:srgbClr val="4B5563"/>
-                </a:solidFill>
-              </a:rPr>
-              <a:t>Uma camada oculta transforma o espaço e torna o problema separável.</a:t>
-            </a:r>
-            <a:endParaRPr lang="en-US" sz="1400" dirty="0"/>
+            <a:pPr marL="342900" indent="-342900">
+              <a:spcAft>
+                <a:spcPts val="1400"/>
+              </a:spcAft>
+              <a:buSzPct val="100000"/>
+              <a:buChar char="•"/>
+            </a:pPr>
+            <a:r>
+              <a:rPr lang="en-US" sz="2400" dirty="0">
+                <a:solidFill>
+                  <a:srgbClr val="1F2937"/>
+                </a:solidFill>
+              </a:rPr>
+              <a:t>Se os dados são linearmente separáveis, o perceptron converge em número finito de correções</a:t>
+            </a:r>
+            <a:endParaRPr lang="en-US" sz="2400" dirty="0"/>
+          </a:p>
+          <a:p>
+            <a:pPr marL="342900" indent="-342900">
+              <a:spcAft>
+                <a:spcPts val="1400"/>
+              </a:spcAft>
+              <a:buSzPct val="100000"/>
+              <a:buChar char="•"/>
+            </a:pPr>
+            <a:r>
+              <a:rPr lang="en-US" sz="2400" dirty="0">
+                <a:solidFill>
+                  <a:srgbClr val="1F2937"/>
+                </a:solidFill>
+              </a:rPr>
+              <a:t>O número de erros é limitado por (R/γ)²</a:t>
+            </a:r>
+            <a:endParaRPr lang="en-US" sz="2400" dirty="0"/>
+          </a:p>
+          <a:p>
+            <a:pPr marL="342900" indent="-342900">
+              <a:spcAft>
+                <a:spcPts val="1400"/>
+              </a:spcAft>
+              <a:buSzPct val="100000"/>
+              <a:buChar char="•"/>
+            </a:pPr>
+            <a:r>
+              <a:rPr lang="en-US" sz="2400" dirty="0">
+                <a:solidFill>
+                  <a:srgbClr val="1F2937"/>
+                </a:solidFill>
+              </a:rPr>
+              <a:t>R: raio dos dados; γ: margem</a:t>
+            </a:r>
+            <a:endParaRPr lang="en-US" sz="2400" dirty="0"/>
+          </a:p>
+          <a:p>
+            <a:pPr marL="342900" indent="-342900">
+              <a:spcAft>
+                <a:spcPts val="1400"/>
+              </a:spcAft>
+              <a:buSzPct val="100000"/>
+              <a:buChar char="•"/>
+            </a:pPr>
+            <a:r>
+              <a:rPr lang="en-US" sz="2400" dirty="0">
+                <a:solidFill>
+                  <a:srgbClr val="1F2937"/>
+                </a:solidFill>
+              </a:rPr>
+              <a:t>Se não há separação, o algoritmo não para sozinho</a:t>
+            </a:r>
+            <a:endParaRPr lang="en-US" sz="2400" dirty="0"/>
           </a:p>
         </p:txBody>
       </p:sp>
